--- a/商策PPT_暑假不回家队.pptx
+++ b/商策PPT_暑假不回家队.pptx
@@ -6,18 +6,21 @@
   </p:sldMasterIdLst>
   <p:sldIdLst>
     <p:sldId id="256" r:id="rId7"/>
-    <p:sldId id="257" r:id="rId8"/>
-    <p:sldId id="258" r:id="rId9"/>
-    <p:sldId id="259" r:id="rId10"/>
-    <p:sldId id="260" r:id="rId11"/>
-    <p:sldId id="261" r:id="rId12"/>
-    <p:sldId id="262" r:id="rId13"/>
-    <p:sldId id="263" r:id="rId14"/>
-    <p:sldId id="264" r:id="rId15"/>
-    <p:sldId id="265" r:id="rId16"/>
-    <p:sldId id="266" r:id="rId17"/>
-    <p:sldId id="267" r:id="rId18"/>
-    <p:sldId id="268" r:id="rId19"/>
+    <p:sldId id="257" r:id="rId9"/>
+    <p:sldId id="258" r:id="rId10"/>
+    <p:sldId id="259" r:id="rId11"/>
+    <p:sldId id="260" r:id="rId12"/>
+    <p:sldId id="261" r:id="rId13"/>
+    <p:sldId id="262" r:id="rId14"/>
+    <p:sldId id="263" r:id="rId15"/>
+    <p:sldId id="264" r:id="rId16"/>
+    <p:sldId id="265" r:id="rId17"/>
+    <p:sldId id="266" r:id="rId18"/>
+    <p:sldId id="267" r:id="rId19"/>
+    <p:sldId id="268" r:id="rId20"/>
+    <p:sldId id="269" r:id="rId21"/>
+    <p:sldId id="270" r:id="rId22"/>
+    <p:sldId id="271" r:id="rId23"/>
   </p:sldIdLst>
   <p:sldSz cx="12191695" cy="6858000" type="screen4x3"/>
   <p:notesSz cx="6858000" cy="9144000"/>
@@ -117,6 +120,1686 @@
     </a:lvl9pPr>
   </p:defaultTextStyle>
 </p:presentation>
+</file>
+
+<file path=ppt/notesMasters/notesMaster1.xml><?xml version="1.0" encoding="utf-8"?>
+<p:notesMaster xmlns:a="http://schemas.openxmlformats.org/drawingml/2006/main" xmlns:p="http://schemas.openxmlformats.org/presentationml/2006/main" xmlns:r="http://schemas.openxmlformats.org/officeDocument/2006/relationships">
+  <p:cSld>
+    <p:bg>
+      <p:bgRef idx="1001">
+        <a:schemeClr val="bg1"/>
+      </p:bgRef>
+    </p:bg>
+    <p:spTree>
+      <p:nvGrpSpPr>
+        <p:cNvPr id="1" name=""/>
+        <p:cNvGrpSpPr/>
+        <p:nvPr/>
+      </p:nvGrpSpPr>
+      <p:grpSpPr>
+        <a:xfrm>
+          <a:off x="0" y="0"/>
+          <a:ext cx="0" cy="0"/>
+          <a:chOff x="0" y="0"/>
+          <a:chExt cx="0" cy="0"/>
+        </a:xfrm>
+      </p:grpSpPr>
+      <p:sp>
+        <p:nvSpPr>
+          <p:cNvPr id="2" name="Header Placeholder 1"/>
+          <p:cNvSpPr>
+            <a:spLocks noGrp="1"/>
+          </p:cNvSpPr>
+          <p:nvPr>
+            <p:ph type="hdr" sz="quarter"/>
+          </p:nvPr>
+        </p:nvSpPr>
+        <p:spPr>
+          <a:xfrm>
+            <a:off x="0" y="0"/>
+            <a:ext cx="2971800" cy="457200"/>
+          </a:xfrm>
+          <a:prstGeom prst="rect">
+            <a:avLst/>
+          </a:prstGeom>
+        </p:spPr>
+        <p:txBody>
+          <a:bodyPr vert="horz" lIns="91440" tIns="45720" rIns="91440" bIns="45720" rtlCol="0"/>
+          <a:lstStyle>
+            <a:lvl1pPr algn="l">
+              <a:defRPr sz="1200"/>
+            </a:lvl1pPr>
+          </a:lstStyle>
+          <a:p>
+            <a:endParaRPr lang="en-US"/>
+          </a:p>
+        </p:txBody>
+      </p:sp>
+      <p:sp>
+        <p:nvSpPr>
+          <p:cNvPr id="3" name="Date Placeholder 2"/>
+          <p:cNvSpPr>
+            <a:spLocks noGrp="1"/>
+          </p:cNvSpPr>
+          <p:nvPr>
+            <p:ph type="dt" idx="1"/>
+          </p:nvPr>
+        </p:nvSpPr>
+        <p:spPr>
+          <a:xfrm>
+            <a:off x="3884613" y="0"/>
+            <a:ext cx="2971800" cy="457200"/>
+          </a:xfrm>
+          <a:prstGeom prst="rect">
+            <a:avLst/>
+          </a:prstGeom>
+        </p:spPr>
+        <p:txBody>
+          <a:bodyPr vert="horz" lIns="91440" tIns="45720" rIns="91440" bIns="45720" rtlCol="0"/>
+          <a:lstStyle>
+            <a:lvl1pPr algn="r">
+              <a:defRPr sz="1200"/>
+            </a:lvl1pPr>
+          </a:lstStyle>
+          <a:p>
+            <a:fld id="{0F89C1C7-3DCD-1040-A9CF-14679D8B5DDD}" type="datetimeFigureOut">
+              <a:rPr lang="en-US" smtClean="0"/>
+              <a:t>10/17/16</a:t>
+            </a:fld>
+            <a:endParaRPr lang="en-US"/>
+          </a:p>
+        </p:txBody>
+      </p:sp>
+      <p:sp>
+        <p:nvSpPr>
+          <p:cNvPr id="4" name="Slide Image Placeholder 3"/>
+          <p:cNvSpPr>
+            <a:spLocks noGrp="1" noRot="1" noChangeAspect="1"/>
+          </p:cNvSpPr>
+          <p:nvPr>
+            <p:ph type="sldImg" idx="2"/>
+          </p:nvPr>
+        </p:nvSpPr>
+        <p:spPr>
+          <a:xfrm>
+            <a:off x="1143000" y="685800"/>
+            <a:ext cx="4572000" cy="3429000"/>
+          </a:xfrm>
+          <a:prstGeom prst="rect">
+            <a:avLst/>
+          </a:prstGeom>
+          <a:noFill/>
+          <a:ln w="12700">
+            <a:solidFill>
+              <a:prstClr val="black"/>
+            </a:solidFill>
+          </a:ln>
+        </p:spPr>
+        <p:txBody>
+          <a:bodyPr vert="horz" lIns="91440" tIns="45720" rIns="91440" bIns="45720" rtlCol="0" anchor="ctr"/>
+          <a:lstStyle/>
+          <a:p>
+            <a:endParaRPr lang="en-US"/>
+          </a:p>
+        </p:txBody>
+      </p:sp>
+      <p:sp>
+        <p:nvSpPr>
+          <p:cNvPr id="5" name="Notes Placeholder 4"/>
+          <p:cNvSpPr>
+            <a:spLocks noGrp="1"/>
+          </p:cNvSpPr>
+          <p:nvPr>
+            <p:ph type="body" sz="quarter" idx="3"/>
+          </p:nvPr>
+        </p:nvSpPr>
+        <p:spPr>
+          <a:xfrm>
+            <a:off x="685800" y="4343400"/>
+            <a:ext cx="5486400" cy="4114800"/>
+          </a:xfrm>
+          <a:prstGeom prst="rect">
+            <a:avLst/>
+          </a:prstGeom>
+        </p:spPr>
+        <p:txBody>
+          <a:bodyPr vert="horz" lIns="91440" tIns="45720" rIns="91440" bIns="45720" rtlCol="0"/>
+          <a:lstStyle/>
+          <a:p>
+            <a:pPr lvl="0"/>
+            <a:r>
+              <a:rPr lang="en-US" smtClean="0"/>
+              <a:t>Click to edit Master text styles</a:t>
+            </a:r>
+          </a:p>
+          <a:p>
+            <a:pPr lvl="1"/>
+            <a:r>
+              <a:rPr lang="en-US" smtClean="0"/>
+              <a:t>Second level</a:t>
+            </a:r>
+          </a:p>
+          <a:p>
+            <a:pPr lvl="2"/>
+            <a:r>
+              <a:rPr lang="en-US" smtClean="0"/>
+              <a:t>Third level</a:t>
+            </a:r>
+          </a:p>
+          <a:p>
+            <a:pPr lvl="3"/>
+            <a:r>
+              <a:rPr lang="en-US" smtClean="0"/>
+              <a:t>Fourth level</a:t>
+            </a:r>
+          </a:p>
+          <a:p>
+            <a:pPr lvl="4"/>
+            <a:r>
+              <a:rPr lang="en-US" smtClean="0"/>
+              <a:t>Fifth level</a:t>
+            </a:r>
+            <a:endParaRPr lang="en-US"/>
+          </a:p>
+        </p:txBody>
+      </p:sp>
+      <p:sp>
+        <p:nvSpPr>
+          <p:cNvPr id="6" name="Footer Placeholder 5"/>
+          <p:cNvSpPr>
+            <a:spLocks noGrp="1"/>
+          </p:cNvSpPr>
+          <p:nvPr>
+            <p:ph type="ftr" sz="quarter" idx="4"/>
+          </p:nvPr>
+        </p:nvSpPr>
+        <p:spPr>
+          <a:xfrm>
+            <a:off x="0" y="8685213"/>
+            <a:ext cx="2971800" cy="457200"/>
+          </a:xfrm>
+          <a:prstGeom prst="rect">
+            <a:avLst/>
+          </a:prstGeom>
+        </p:spPr>
+        <p:txBody>
+          <a:bodyPr vert="horz" lIns="91440" tIns="45720" rIns="91440" bIns="45720" rtlCol="0" anchor="b"/>
+          <a:lstStyle>
+            <a:lvl1pPr algn="l">
+              <a:defRPr sz="1200"/>
+            </a:lvl1pPr>
+          </a:lstStyle>
+          <a:p>
+            <a:endParaRPr lang="en-US"/>
+          </a:p>
+        </p:txBody>
+      </p:sp>
+      <p:sp>
+        <p:nvSpPr>
+          <p:cNvPr id="7" name="Slide Number Placeholder 6"/>
+          <p:cNvSpPr>
+            <a:spLocks noGrp="1"/>
+          </p:cNvSpPr>
+          <p:nvPr>
+            <p:ph type="sldNum" sz="quarter" idx="5"/>
+          </p:nvPr>
+        </p:nvSpPr>
+        <p:spPr>
+          <a:xfrm>
+            <a:off x="3884613" y="8685213"/>
+            <a:ext cx="2971800" cy="457200"/>
+          </a:xfrm>
+          <a:prstGeom prst="rect">
+            <a:avLst/>
+          </a:prstGeom>
+        </p:spPr>
+        <p:txBody>
+          <a:bodyPr vert="horz" lIns="91440" tIns="45720" rIns="91440" bIns="45720" rtlCol="0" anchor="b"/>
+          <a:lstStyle>
+            <a:lvl1pPr algn="r">
+              <a:defRPr sz="1200"/>
+            </a:lvl1pPr>
+          </a:lstStyle>
+          <a:p>
+            <a:fld id="{BB5E49A5-4136-284D-997B-48E1D791AD67}" type="slidenum">
+              <a:rPr lang="en-US" smtClean="0"/>
+              <a:t>‹#›</a:t>
+            </a:fld>
+            <a:endParaRPr lang="en-US"/>
+          </a:p>
+        </p:txBody>
+      </p:sp>
+    </p:spTree>
+    <p:extLst>
+      <p:ext uri="{BB962C8B-B14F-4D97-AF65-F5344CB8AC3E}">
+        <p14:creationId xmlns:p14="http://schemas.microsoft.com/office/powerpoint/2010/main" val="2623252185"/>
+      </p:ext>
+    </p:extLst>
+  </p:cSld>
+  <p:clrMap bg1="lt1" tx1="dk1" bg2="lt2" tx2="dk2" accent1="accent1" accent2="accent2" accent3="accent3" accent4="accent4" accent5="accent5" accent6="accent6" hlink="hlink" folHlink="folHlink"/>
+  <p:notesStyle>
+    <a:lvl1pPr marL="0" algn="l" defTabSz="457200" rtl="0" eaLnBrk="1" latinLnBrk="0" hangingPunct="1">
+      <a:defRPr sz="1200" kern="1200">
+        <a:solidFill>
+          <a:schemeClr val="tx1"/>
+        </a:solidFill>
+        <a:latin typeface="+mn-lt"/>
+        <a:ea typeface="+mn-ea"/>
+        <a:cs typeface="+mn-cs"/>
+      </a:defRPr>
+    </a:lvl1pPr>
+    <a:lvl2pPr marL="457200" algn="l" defTabSz="457200" rtl="0" eaLnBrk="1" latinLnBrk="0" hangingPunct="1">
+      <a:defRPr sz="1200" kern="1200">
+        <a:solidFill>
+          <a:schemeClr val="tx1"/>
+        </a:solidFill>
+        <a:latin typeface="+mn-lt"/>
+        <a:ea typeface="+mn-ea"/>
+        <a:cs typeface="+mn-cs"/>
+      </a:defRPr>
+    </a:lvl2pPr>
+    <a:lvl3pPr marL="914400" algn="l" defTabSz="457200" rtl="0" eaLnBrk="1" latinLnBrk="0" hangingPunct="1">
+      <a:defRPr sz="1200" kern="1200">
+        <a:solidFill>
+          <a:schemeClr val="tx1"/>
+        </a:solidFill>
+        <a:latin typeface="+mn-lt"/>
+        <a:ea typeface="+mn-ea"/>
+        <a:cs typeface="+mn-cs"/>
+      </a:defRPr>
+    </a:lvl3pPr>
+    <a:lvl4pPr marL="1371600" algn="l" defTabSz="457200" rtl="0" eaLnBrk="1" latinLnBrk="0" hangingPunct="1">
+      <a:defRPr sz="1200" kern="1200">
+        <a:solidFill>
+          <a:schemeClr val="tx1"/>
+        </a:solidFill>
+        <a:latin typeface="+mn-lt"/>
+        <a:ea typeface="+mn-ea"/>
+        <a:cs typeface="+mn-cs"/>
+      </a:defRPr>
+    </a:lvl4pPr>
+    <a:lvl5pPr marL="1828800" algn="l" defTabSz="457200" rtl="0" eaLnBrk="1" latinLnBrk="0" hangingPunct="1">
+      <a:defRPr sz="1200" kern="1200">
+        <a:solidFill>
+          <a:schemeClr val="tx1"/>
+        </a:solidFill>
+        <a:latin typeface="+mn-lt"/>
+        <a:ea typeface="+mn-ea"/>
+        <a:cs typeface="+mn-cs"/>
+      </a:defRPr>
+    </a:lvl5pPr>
+    <a:lvl6pPr marL="2286000" algn="l" defTabSz="457200" rtl="0" eaLnBrk="1" latinLnBrk="0" hangingPunct="1">
+      <a:defRPr sz="1200" kern="1200">
+        <a:solidFill>
+          <a:schemeClr val="tx1"/>
+        </a:solidFill>
+        <a:latin typeface="+mn-lt"/>
+        <a:ea typeface="+mn-ea"/>
+        <a:cs typeface="+mn-cs"/>
+      </a:defRPr>
+    </a:lvl6pPr>
+    <a:lvl7pPr marL="2743200" algn="l" defTabSz="457200" rtl="0" eaLnBrk="1" latinLnBrk="0" hangingPunct="1">
+      <a:defRPr sz="1200" kern="1200">
+        <a:solidFill>
+          <a:schemeClr val="tx1"/>
+        </a:solidFill>
+        <a:latin typeface="+mn-lt"/>
+        <a:ea typeface="+mn-ea"/>
+        <a:cs typeface="+mn-cs"/>
+      </a:defRPr>
+    </a:lvl7pPr>
+    <a:lvl8pPr marL="3200400" algn="l" defTabSz="457200" rtl="0" eaLnBrk="1" latinLnBrk="0" hangingPunct="1">
+      <a:defRPr sz="1200" kern="1200">
+        <a:solidFill>
+          <a:schemeClr val="tx1"/>
+        </a:solidFill>
+        <a:latin typeface="+mn-lt"/>
+        <a:ea typeface="+mn-ea"/>
+        <a:cs typeface="+mn-cs"/>
+      </a:defRPr>
+    </a:lvl8pPr>
+    <a:lvl9pPr marL="3657600" algn="l" defTabSz="457200" rtl="0" eaLnBrk="1" latinLnBrk="0" hangingPunct="1">
+      <a:defRPr sz="1200" kern="1200">
+        <a:solidFill>
+          <a:schemeClr val="tx1"/>
+        </a:solidFill>
+        <a:latin typeface="+mn-lt"/>
+        <a:ea typeface="+mn-ea"/>
+        <a:cs typeface="+mn-cs"/>
+      </a:defRPr>
+    </a:lvl9pPr>
+  </p:notesStyle>
+</p:notesMaster>
+</file>
+
+<file path=ppt/notesSlides/notesSlide1.xml><?xml version="1.0" encoding="utf-8"?>
+<p:notes xmlns:a="http://schemas.openxmlformats.org/drawingml/2006/main" xmlns:p="http://schemas.openxmlformats.org/presentationml/2006/main" xmlns:r="http://schemas.openxmlformats.org/officeDocument/2006/relationships">
+  <p:cSld>
+    <p:spTree>
+      <p:nvGrpSpPr>
+        <p:cNvPr id="1" name=""/>
+        <p:cNvGrpSpPr/>
+        <p:nvPr/>
+      </p:nvGrpSpPr>
+      <p:grpSpPr>
+        <a:xfrm>
+          <a:off x="0" y="0"/>
+          <a:ext cx="0" cy="0"/>
+          <a:chOff x="0" y="0"/>
+          <a:chExt cx="0" cy="0"/>
+        </a:xfrm>
+      </p:grpSpPr>
+      <p:sp>
+        <p:nvSpPr>
+          <p:cNvPr id="2" name="Slide Image Placeholder 1"/>
+          <p:cNvSpPr>
+            <a:spLocks noGrp="1"/>
+          </p:cNvSpPr>
+          <p:nvPr>
+            <p:ph type="sldImg" idx="2"/>
+          </p:nvPr>
+        </p:nvSpPr>
+        <p:spPr/>
+      </p:sp>
+      <p:sp>
+        <p:nvSpPr>
+          <p:cNvPr id="3" name="Notes Placeholder 2"/>
+          <p:cNvSpPr>
+            <a:spLocks noGrp="1"/>
+          </p:cNvSpPr>
+          <p:nvPr>
+            <p:ph type="body" idx="3" sz="quarter"/>
+          </p:nvPr>
+        </p:nvSpPr>
+        <p:spPr/>
+        <p:txBody>
+          <a:bodyPr/>
+          <a:lstStyle/>
+          <a:p>
+            <a:r>
+              <a:t>【开场 30 秒】</a:t>
+            </a:r>
+          </a:p>
+          <a:p>
+            <a:r>
+              <a:t>语气：自信、平稳。</a:t>
+            </a:r>
+          </a:p>
+          <a:p>
+            <a:r>
+              <a:t>先报队名和题目，一句话点题：'我们把 CFA 道德准则，变成一线员工随开随用的合规 Agent。'</a:t>
+            </a:r>
+          </a:p>
+          <a:p>
+            <a:r>
+              <a:t>强调'Agent'这个词——这是本次大赛主题的关键词，第一句就要让评委记住你是紧扣主题的。</a:t>
+            </a:r>
+          </a:p>
+        </p:txBody>
+      </p:sp>
+      <p:sp>
+        <p:nvSpPr>
+          <p:cNvPr id="4" name="Slide Number Placeholder 3"/>
+          <p:cNvSpPr>
+            <a:spLocks noGrp="1"/>
+          </p:cNvSpPr>
+          <p:nvPr>
+            <p:ph type="sldNum" idx="5" sz="quarter"/>
+          </p:nvPr>
+        </p:nvSpPr>
+        <p:spPr/>
+      </p:sp>
+    </p:spTree>
+  </p:cSld>
+  <p:clrMapOvr>
+    <a:masterClrMapping/>
+  </p:clrMapOvr>
+</p:notes>
+</file>
+
+<file path=ppt/notesSlides/notesSlide10.xml><?xml version="1.0" encoding="utf-8"?>
+<p:notes xmlns:a="http://schemas.openxmlformats.org/drawingml/2006/main" xmlns:p="http://schemas.openxmlformats.org/presentationml/2006/main" xmlns:r="http://schemas.openxmlformats.org/officeDocument/2006/relationships">
+  <p:cSld>
+    <p:spTree>
+      <p:nvGrpSpPr>
+        <p:cNvPr id="1" name=""/>
+        <p:cNvGrpSpPr/>
+        <p:nvPr/>
+      </p:nvGrpSpPr>
+      <p:grpSpPr>
+        <a:xfrm>
+          <a:off x="0" y="0"/>
+          <a:ext cx="0" cy="0"/>
+          <a:chOff x="0" y="0"/>
+          <a:chExt cx="0" cy="0"/>
+        </a:xfrm>
+      </p:grpSpPr>
+      <p:sp>
+        <p:nvSpPr>
+          <p:cNvPr id="2" name="Slide Image Placeholder 1"/>
+          <p:cNvSpPr>
+            <a:spLocks noGrp="1"/>
+          </p:cNvSpPr>
+          <p:nvPr>
+            <p:ph type="sldImg" idx="2"/>
+          </p:nvPr>
+        </p:nvSpPr>
+        <p:spPr/>
+      </p:sp>
+      <p:sp>
+        <p:nvSpPr>
+          <p:cNvPr id="3" name="Notes Placeholder 2"/>
+          <p:cNvSpPr>
+            <a:spLocks noGrp="1"/>
+          </p:cNvSpPr>
+          <p:nvPr>
+            <p:ph type="body" idx="3" sz="quarter"/>
+          </p:nvPr>
+        </p:nvSpPr>
+        <p:spPr/>
+        <p:txBody>
+          <a:bodyPr/>
+          <a:lstStyle/>
+          <a:p>
+            <a:r>
+              <a:t>【90 秒】★记忆点页，全场最值得花时间</a:t>
+            </a:r>
+          </a:p>
+          <a:p>
+            <a:r>
+              <a:t>讲法：边操作边讲，节奏放慢。</a:t>
+            </a:r>
+          </a:p>
+          <a:p>
+            <a:r>
+              <a:t>'大家看，输入这句话，系统立刻给出高风险和拦截，还引用了题库案例；点前往申报，自动生成带编号的申报单；点一键发送，邮件直接到合规部邮箱。'</a:t>
+            </a:r>
+          </a:p>
+          <a:p>
+            <a:r>
+              <a:t>最后展示邮箱实时收到，强调'这就是从识别到行动的完整闭环'。</a:t>
+            </a:r>
+          </a:p>
+          <a:p>
+            <a:r>
+              <a:t>若现场网络不稳，立即切到提前录好的视频，保证不冷场。</a:t>
+            </a:r>
+          </a:p>
+        </p:txBody>
+      </p:sp>
+      <p:sp>
+        <p:nvSpPr>
+          <p:cNvPr id="4" name="Slide Number Placeholder 3"/>
+          <p:cNvSpPr>
+            <a:spLocks noGrp="1"/>
+          </p:cNvSpPr>
+          <p:nvPr>
+            <p:ph type="sldNum" idx="5" sz="quarter"/>
+          </p:nvPr>
+        </p:nvSpPr>
+        <p:spPr/>
+      </p:sp>
+    </p:spTree>
+  </p:cSld>
+  <p:clrMapOvr>
+    <a:masterClrMapping/>
+  </p:clrMapOvr>
+</p:notes>
+</file>
+
+<file path=ppt/notesSlides/notesSlide11.xml><?xml version="1.0" encoding="utf-8"?>
+<p:notes xmlns:a="http://schemas.openxmlformats.org/drawingml/2006/main" xmlns:p="http://schemas.openxmlformats.org/presentationml/2006/main" xmlns:r="http://schemas.openxmlformats.org/officeDocument/2006/relationships">
+  <p:cSld>
+    <p:spTree>
+      <p:nvGrpSpPr>
+        <p:cNvPr id="1" name=""/>
+        <p:cNvGrpSpPr/>
+        <p:nvPr/>
+      </p:nvGrpSpPr>
+      <p:grpSpPr>
+        <a:xfrm>
+          <a:off x="0" y="0"/>
+          <a:ext cx="0" cy="0"/>
+          <a:chOff x="0" y="0"/>
+          <a:chExt cx="0" cy="0"/>
+        </a:xfrm>
+      </p:grpSpPr>
+      <p:sp>
+        <p:nvSpPr>
+          <p:cNvPr id="2" name="Slide Image Placeholder 1"/>
+          <p:cNvSpPr>
+            <a:spLocks noGrp="1"/>
+          </p:cNvSpPr>
+          <p:nvPr>
+            <p:ph type="sldImg" idx="2"/>
+          </p:nvPr>
+        </p:nvSpPr>
+        <p:spPr/>
+      </p:sp>
+      <p:sp>
+        <p:nvSpPr>
+          <p:cNvPr id="3" name="Notes Placeholder 2"/>
+          <p:cNvSpPr>
+            <a:spLocks noGrp="1"/>
+          </p:cNvSpPr>
+          <p:nvPr>
+            <p:ph type="body" idx="3" sz="quarter"/>
+          </p:nvPr>
+        </p:nvSpPr>
+        <p:spPr/>
+        <p:txBody>
+          <a:bodyPr/>
+          <a:lstStyle/>
+          <a:p>
+            <a:r>
+              <a:t>【45 秒】</a:t>
+            </a:r>
+          </a:p>
+          <a:p>
+            <a:r>
+              <a:t>用数据证明'做得出来、测得过'。</a:t>
+            </a:r>
+          </a:p>
+          <a:p>
+            <a:r>
+              <a:t>讲法：'数据来源权威、处理规范，而且 29 项测试全过，边界情况也不会误报。'</a:t>
+            </a:r>
+          </a:p>
+        </p:txBody>
+      </p:sp>
+      <p:sp>
+        <p:nvSpPr>
+          <p:cNvPr id="4" name="Slide Number Placeholder 3"/>
+          <p:cNvSpPr>
+            <a:spLocks noGrp="1"/>
+          </p:cNvSpPr>
+          <p:nvPr>
+            <p:ph type="sldNum" idx="5" sz="quarter"/>
+          </p:nvPr>
+        </p:nvSpPr>
+        <p:spPr/>
+      </p:sp>
+    </p:spTree>
+  </p:cSld>
+  <p:clrMapOvr>
+    <a:masterClrMapping/>
+  </p:clrMapOvr>
+</p:notes>
+</file>
+
+<file path=ppt/notesSlides/notesSlide12.xml><?xml version="1.0" encoding="utf-8"?>
+<p:notes xmlns:a="http://schemas.openxmlformats.org/drawingml/2006/main" xmlns:p="http://schemas.openxmlformats.org/presentationml/2006/main" xmlns:r="http://schemas.openxmlformats.org/officeDocument/2006/relationships">
+  <p:cSld>
+    <p:spTree>
+      <p:nvGrpSpPr>
+        <p:cNvPr id="1" name=""/>
+        <p:cNvGrpSpPr/>
+        <p:nvPr/>
+      </p:nvGrpSpPr>
+      <p:grpSpPr>
+        <a:xfrm>
+          <a:off x="0" y="0"/>
+          <a:ext cx="0" cy="0"/>
+          <a:chOff x="0" y="0"/>
+          <a:chExt cx="0" cy="0"/>
+        </a:xfrm>
+      </p:grpSpPr>
+      <p:sp>
+        <p:nvSpPr>
+          <p:cNvPr id="2" name="Slide Image Placeholder 1"/>
+          <p:cNvSpPr>
+            <a:spLocks noGrp="1"/>
+          </p:cNvSpPr>
+          <p:nvPr>
+            <p:ph type="sldImg" idx="2"/>
+          </p:nvPr>
+        </p:nvSpPr>
+        <p:spPr/>
+      </p:sp>
+      <p:sp>
+        <p:nvSpPr>
+          <p:cNvPr id="3" name="Notes Placeholder 2"/>
+          <p:cNvSpPr>
+            <a:spLocks noGrp="1"/>
+          </p:cNvSpPr>
+          <p:nvPr>
+            <p:ph type="body" idx="3" sz="quarter"/>
+          </p:nvPr>
+        </p:nvSpPr>
+        <p:spPr/>
+        <p:txBody>
+          <a:bodyPr/>
+          <a:lstStyle/>
+          <a:p>
+            <a:r>
+              <a:t>【60 秒】★关键页，评委必问</a:t>
+            </a:r>
+          </a:p>
+          <a:p>
+            <a:r>
+              <a:t>讲法：'赛道提了五大挑战，我们不是回避，是每一个都有工程实现。'</a:t>
+            </a:r>
+          </a:p>
+          <a:p>
+            <a:r>
+              <a:t>逐条念，念完补一句：'这些不是纸面承诺，是已经在系统里落地的东西。'</a:t>
+            </a:r>
+          </a:p>
+          <a:p>
+            <a:r>
+              <a:t>这页要和第六章的问答准备对上，评委追问时从这里展开。</a:t>
+            </a:r>
+          </a:p>
+        </p:txBody>
+      </p:sp>
+      <p:sp>
+        <p:nvSpPr>
+          <p:cNvPr id="4" name="Slide Number Placeholder 3"/>
+          <p:cNvSpPr>
+            <a:spLocks noGrp="1"/>
+          </p:cNvSpPr>
+          <p:nvPr>
+            <p:ph type="sldNum" idx="5" sz="quarter"/>
+          </p:nvPr>
+        </p:nvSpPr>
+        <p:spPr/>
+      </p:sp>
+    </p:spTree>
+  </p:cSld>
+  <p:clrMapOvr>
+    <a:masterClrMapping/>
+  </p:clrMapOvr>
+</p:notes>
+</file>
+
+<file path=ppt/notesSlides/notesSlide13.xml><?xml version="1.0" encoding="utf-8"?>
+<p:notes xmlns:a="http://schemas.openxmlformats.org/drawingml/2006/main" xmlns:p="http://schemas.openxmlformats.org/presentationml/2006/main" xmlns:r="http://schemas.openxmlformats.org/officeDocument/2006/relationships">
+  <p:cSld>
+    <p:spTree>
+      <p:nvGrpSpPr>
+        <p:cNvPr id="1" name=""/>
+        <p:cNvGrpSpPr/>
+        <p:nvPr/>
+      </p:nvGrpSpPr>
+      <p:grpSpPr>
+        <a:xfrm>
+          <a:off x="0" y="0"/>
+          <a:ext cx="0" cy="0"/>
+          <a:chOff x="0" y="0"/>
+          <a:chExt cx="0" cy="0"/>
+        </a:xfrm>
+      </p:grpSpPr>
+      <p:sp>
+        <p:nvSpPr>
+          <p:cNvPr id="2" name="Slide Image Placeholder 1"/>
+          <p:cNvSpPr>
+            <a:spLocks noGrp="1"/>
+          </p:cNvSpPr>
+          <p:nvPr>
+            <p:ph type="sldImg" idx="2"/>
+          </p:nvPr>
+        </p:nvSpPr>
+        <p:spPr/>
+      </p:sp>
+      <p:sp>
+        <p:nvSpPr>
+          <p:cNvPr id="3" name="Notes Placeholder 2"/>
+          <p:cNvSpPr>
+            <a:spLocks noGrp="1"/>
+          </p:cNvSpPr>
+          <p:nvPr>
+            <p:ph type="body" idx="3" sz="quarter"/>
+          </p:nvPr>
+        </p:nvSpPr>
+        <p:spPr/>
+        <p:txBody>
+          <a:bodyPr/>
+          <a:lstStyle/>
+          <a:p>
+            <a:r>
+              <a:t>【50 秒】</a:t>
+            </a:r>
+          </a:p>
+          <a:p>
+            <a:r>
+              <a:t>这页呼应'持续优化'能力，也体现真实投入。</a:t>
+            </a:r>
+          </a:p>
+          <a:p>
+            <a:r>
+              <a:t>讲法：'我们没有一步到位，而是经历了六次迭代，第四步是关键的质变——加上任务执行，它才真正从一个工具变成 Agent。'</a:t>
+            </a:r>
+          </a:p>
+          <a:p>
+            <a:r>
+              <a:t>可点一句：'持续优化不是口号，是我们实际走过的路。'</a:t>
+            </a:r>
+          </a:p>
+        </p:txBody>
+      </p:sp>
+      <p:sp>
+        <p:nvSpPr>
+          <p:cNvPr id="4" name="Slide Number Placeholder 3"/>
+          <p:cNvSpPr>
+            <a:spLocks noGrp="1"/>
+          </p:cNvSpPr>
+          <p:nvPr>
+            <p:ph type="sldNum" idx="5" sz="quarter"/>
+          </p:nvPr>
+        </p:nvSpPr>
+        <p:spPr/>
+      </p:sp>
+    </p:spTree>
+  </p:cSld>
+  <p:clrMapOvr>
+    <a:masterClrMapping/>
+  </p:clrMapOvr>
+</p:notes>
+</file>
+
+<file path=ppt/notesSlides/notesSlide14.xml><?xml version="1.0" encoding="utf-8"?>
+<p:notes xmlns:a="http://schemas.openxmlformats.org/drawingml/2006/main" xmlns:p="http://schemas.openxmlformats.org/presentationml/2006/main" xmlns:r="http://schemas.openxmlformats.org/officeDocument/2006/relationships">
+  <p:cSld>
+    <p:spTree>
+      <p:nvGrpSpPr>
+        <p:cNvPr id="1" name=""/>
+        <p:cNvGrpSpPr/>
+        <p:nvPr/>
+      </p:nvGrpSpPr>
+      <p:grpSpPr>
+        <a:xfrm>
+          <a:off x="0" y="0"/>
+          <a:ext cx="0" cy="0"/>
+          <a:chOff x="0" y="0"/>
+          <a:chExt cx="0" cy="0"/>
+        </a:xfrm>
+      </p:grpSpPr>
+      <p:sp>
+        <p:nvSpPr>
+          <p:cNvPr id="2" name="Slide Image Placeholder 1"/>
+          <p:cNvSpPr>
+            <a:spLocks noGrp="1"/>
+          </p:cNvSpPr>
+          <p:nvPr>
+            <p:ph type="sldImg" idx="2"/>
+          </p:nvPr>
+        </p:nvSpPr>
+        <p:spPr/>
+      </p:sp>
+      <p:sp>
+        <p:nvSpPr>
+          <p:cNvPr id="3" name="Notes Placeholder 2"/>
+          <p:cNvSpPr>
+            <a:spLocks noGrp="1"/>
+          </p:cNvSpPr>
+          <p:nvPr>
+            <p:ph type="body" idx="3" sz="quarter"/>
+          </p:nvPr>
+        </p:nvSpPr>
+        <p:spPr/>
+        <p:txBody>
+          <a:bodyPr/>
+          <a:lstStyle/>
+          <a:p>
+            <a:r>
+              <a:t>【45 秒】</a:t>
+            </a:r>
+          </a:p>
+          <a:p>
+            <a:r>
+              <a:t>展示方案的想象空间和可复制性。</a:t>
+            </a:r>
+          </a:p>
+          <a:p>
+            <a:r>
+              <a:t>讲法：'它不止解决 CFA 合规，这套「规则驱动+案例约束+任务执行」的方法论，可以复制到更广的合规域，甚至投资和风控场景。'</a:t>
+            </a:r>
+          </a:p>
+        </p:txBody>
+      </p:sp>
+      <p:sp>
+        <p:nvSpPr>
+          <p:cNvPr id="4" name="Slide Number Placeholder 3"/>
+          <p:cNvSpPr>
+            <a:spLocks noGrp="1"/>
+          </p:cNvSpPr>
+          <p:nvPr>
+            <p:ph type="sldNum" idx="5" sz="quarter"/>
+          </p:nvPr>
+        </p:nvSpPr>
+        <p:spPr/>
+      </p:sp>
+    </p:spTree>
+  </p:cSld>
+  <p:clrMapOvr>
+    <a:masterClrMapping/>
+  </p:clrMapOvr>
+</p:notes>
+</file>
+
+<file path=ppt/notesSlides/notesSlide15.xml><?xml version="1.0" encoding="utf-8"?>
+<p:notes xmlns:a="http://schemas.openxmlformats.org/drawingml/2006/main" xmlns:p="http://schemas.openxmlformats.org/presentationml/2006/main" xmlns:r="http://schemas.openxmlformats.org/officeDocument/2006/relationships">
+  <p:cSld>
+    <p:spTree>
+      <p:nvGrpSpPr>
+        <p:cNvPr id="1" name=""/>
+        <p:cNvGrpSpPr/>
+        <p:nvPr/>
+      </p:nvGrpSpPr>
+      <p:grpSpPr>
+        <a:xfrm>
+          <a:off x="0" y="0"/>
+          <a:ext cx="0" cy="0"/>
+          <a:chOff x="0" y="0"/>
+          <a:chExt cx="0" cy="0"/>
+        </a:xfrm>
+      </p:grpSpPr>
+      <p:sp>
+        <p:nvSpPr>
+          <p:cNvPr id="2" name="Slide Image Placeholder 1"/>
+          <p:cNvSpPr>
+            <a:spLocks noGrp="1"/>
+          </p:cNvSpPr>
+          <p:nvPr>
+            <p:ph type="sldImg" idx="2"/>
+          </p:nvPr>
+        </p:nvSpPr>
+        <p:spPr/>
+      </p:sp>
+      <p:sp>
+        <p:nvSpPr>
+          <p:cNvPr id="3" name="Notes Placeholder 2"/>
+          <p:cNvSpPr>
+            <a:spLocks noGrp="1"/>
+          </p:cNvSpPr>
+          <p:nvPr>
+            <p:ph type="body" idx="3" sz="quarter"/>
+          </p:nvPr>
+        </p:nvSpPr>
+        <p:spPr/>
+        <p:txBody>
+          <a:bodyPr/>
+          <a:lstStyle/>
+          <a:p>
+            <a:r>
+              <a:t>【35 秒】</a:t>
+            </a:r>
+          </a:p>
+          <a:p>
+            <a:r>
+              <a:t>简略带过，不要展开太多，时间留给演示和挑战应对。</a:t>
+            </a:r>
+          </a:p>
+          <a:p>
+            <a:r>
+              <a:t>讲法：'商业模式上分三层，从免费引流到企业订阅和私有化部署。'</a:t>
+            </a:r>
+          </a:p>
+        </p:txBody>
+      </p:sp>
+      <p:sp>
+        <p:nvSpPr>
+          <p:cNvPr id="4" name="Slide Number Placeholder 3"/>
+          <p:cNvSpPr>
+            <a:spLocks noGrp="1"/>
+          </p:cNvSpPr>
+          <p:nvPr>
+            <p:ph type="sldNum" idx="5" sz="quarter"/>
+          </p:nvPr>
+        </p:nvSpPr>
+        <p:spPr/>
+      </p:sp>
+    </p:spTree>
+  </p:cSld>
+  <p:clrMapOvr>
+    <a:masterClrMapping/>
+  </p:clrMapOvr>
+</p:notes>
+</file>
+
+<file path=ppt/notesSlides/notesSlide16.xml><?xml version="1.0" encoding="utf-8"?>
+<p:notes xmlns:a="http://schemas.openxmlformats.org/drawingml/2006/main" xmlns:p="http://schemas.openxmlformats.org/presentationml/2006/main" xmlns:r="http://schemas.openxmlformats.org/officeDocument/2006/relationships">
+  <p:cSld>
+    <p:spTree>
+      <p:nvGrpSpPr>
+        <p:cNvPr id="1" name=""/>
+        <p:cNvGrpSpPr/>
+        <p:nvPr/>
+      </p:nvGrpSpPr>
+      <p:grpSpPr>
+        <a:xfrm>
+          <a:off x="0" y="0"/>
+          <a:ext cx="0" cy="0"/>
+          <a:chOff x="0" y="0"/>
+          <a:chExt cx="0" cy="0"/>
+        </a:xfrm>
+      </p:grpSpPr>
+      <p:sp>
+        <p:nvSpPr>
+          <p:cNvPr id="2" name="Slide Image Placeholder 1"/>
+          <p:cNvSpPr>
+            <a:spLocks noGrp="1"/>
+          </p:cNvSpPr>
+          <p:nvPr>
+            <p:ph type="sldImg" idx="2"/>
+          </p:nvPr>
+        </p:nvSpPr>
+        <p:spPr/>
+      </p:sp>
+      <p:sp>
+        <p:nvSpPr>
+          <p:cNvPr id="3" name="Notes Placeholder 2"/>
+          <p:cNvSpPr>
+            <a:spLocks noGrp="1"/>
+          </p:cNvSpPr>
+          <p:nvPr>
+            <p:ph type="body" idx="3" sz="quarter"/>
+          </p:nvPr>
+        </p:nvSpPr>
+        <p:spPr/>
+        <p:txBody>
+          <a:bodyPr/>
+          <a:lstStyle/>
+          <a:p>
+            <a:r>
+              <a:t>【40 秒】</a:t>
+            </a:r>
+          </a:p>
+          <a:p>
+            <a:r>
+              <a:t>收尾三连：创新点 → 团队 → 感谢。</a:t>
+            </a:r>
+          </a:p>
+          <a:p>
+            <a:r>
+              <a:t>讲法：'我们的创新在于，把 Agent 从机构级下沉到个人合规辅助，用规则驱动保证可解释，用离线架构保证可落地。以上是暑假不回家队的汇报，感谢评委，欢迎提问。'</a:t>
+            </a:r>
+          </a:p>
+          <a:p>
+            <a:r>
+              <a:t>说完站在原地等提问，不要急着下台。</a:t>
+            </a:r>
+          </a:p>
+        </p:txBody>
+      </p:sp>
+      <p:sp>
+        <p:nvSpPr>
+          <p:cNvPr id="4" name="Slide Number Placeholder 3"/>
+          <p:cNvSpPr>
+            <a:spLocks noGrp="1"/>
+          </p:cNvSpPr>
+          <p:nvPr>
+            <p:ph type="sldNum" idx="5" sz="quarter"/>
+          </p:nvPr>
+        </p:nvSpPr>
+        <p:spPr/>
+      </p:sp>
+    </p:spTree>
+  </p:cSld>
+  <p:clrMapOvr>
+    <a:masterClrMapping/>
+  </p:clrMapOvr>
+</p:notes>
+</file>
+
+<file path=ppt/notesSlides/notesSlide2.xml><?xml version="1.0" encoding="utf-8"?>
+<p:notes xmlns:a="http://schemas.openxmlformats.org/drawingml/2006/main" xmlns:p="http://schemas.openxmlformats.org/presentationml/2006/main" xmlns:r="http://schemas.openxmlformats.org/officeDocument/2006/relationships">
+  <p:cSld>
+    <p:spTree>
+      <p:nvGrpSpPr>
+        <p:cNvPr id="1" name=""/>
+        <p:cNvGrpSpPr/>
+        <p:nvPr/>
+      </p:nvGrpSpPr>
+      <p:grpSpPr>
+        <a:xfrm>
+          <a:off x="0" y="0"/>
+          <a:ext cx="0" cy="0"/>
+          <a:chOff x="0" y="0"/>
+          <a:chExt cx="0" cy="0"/>
+        </a:xfrm>
+      </p:grpSpPr>
+      <p:sp>
+        <p:nvSpPr>
+          <p:cNvPr id="2" name="Slide Image Placeholder 1"/>
+          <p:cNvSpPr>
+            <a:spLocks noGrp="1"/>
+          </p:cNvSpPr>
+          <p:nvPr>
+            <p:ph type="sldImg" idx="2"/>
+          </p:nvPr>
+        </p:nvSpPr>
+        <p:spPr/>
+      </p:sp>
+      <p:sp>
+        <p:nvSpPr>
+          <p:cNvPr id="3" name="Notes Placeholder 2"/>
+          <p:cNvSpPr>
+            <a:spLocks noGrp="1"/>
+          </p:cNvSpPr>
+          <p:nvPr>
+            <p:ph type="body" idx="3" sz="quarter"/>
+          </p:nvPr>
+        </p:nvSpPr>
+        <p:spPr/>
+        <p:txBody>
+          <a:bodyPr/>
+          <a:lstStyle/>
+          <a:p>
+            <a:r>
+              <a:t>【45 秒】</a:t>
+            </a:r>
+          </a:p>
+          <a:p>
+            <a:r>
+              <a:t>这页是总纲，先把三个亮点亮出来，后面逐页展开。</a:t>
+            </a:r>
+          </a:p>
+          <a:p>
+            <a:r>
+              <a:t>讲法：'我们的核心，是把合规从「提建议」变成「替办事」。'</a:t>
+            </a:r>
+          </a:p>
+        </p:txBody>
+      </p:sp>
+      <p:sp>
+        <p:nvSpPr>
+          <p:cNvPr id="4" name="Slide Number Placeholder 3"/>
+          <p:cNvSpPr>
+            <a:spLocks noGrp="1"/>
+          </p:cNvSpPr>
+          <p:nvPr>
+            <p:ph type="sldNum" idx="5" sz="quarter"/>
+          </p:nvPr>
+        </p:nvSpPr>
+        <p:spPr/>
+      </p:sp>
+    </p:spTree>
+  </p:cSld>
+  <p:clrMapOvr>
+    <a:masterClrMapping/>
+  </p:clrMapOvr>
+</p:notes>
+</file>
+
+<file path=ppt/notesSlides/notesSlide3.xml><?xml version="1.0" encoding="utf-8"?>
+<p:notes xmlns:a="http://schemas.openxmlformats.org/drawingml/2006/main" xmlns:p="http://schemas.openxmlformats.org/presentationml/2006/main" xmlns:r="http://schemas.openxmlformats.org/officeDocument/2006/relationships">
+  <p:cSld>
+    <p:spTree>
+      <p:nvGrpSpPr>
+        <p:cNvPr id="1" name=""/>
+        <p:cNvGrpSpPr/>
+        <p:nvPr/>
+      </p:nvGrpSpPr>
+      <p:grpSpPr>
+        <a:xfrm>
+          <a:off x="0" y="0"/>
+          <a:ext cx="0" cy="0"/>
+          <a:chOff x="0" y="0"/>
+          <a:chExt cx="0" cy="0"/>
+        </a:xfrm>
+      </p:grpSpPr>
+      <p:sp>
+        <p:nvSpPr>
+          <p:cNvPr id="2" name="Slide Image Placeholder 1"/>
+          <p:cNvSpPr>
+            <a:spLocks noGrp="1"/>
+          </p:cNvSpPr>
+          <p:nvPr>
+            <p:ph type="sldImg" idx="2"/>
+          </p:nvPr>
+        </p:nvSpPr>
+        <p:spPr/>
+      </p:sp>
+      <p:sp>
+        <p:nvSpPr>
+          <p:cNvPr id="3" name="Notes Placeholder 2"/>
+          <p:cNvSpPr>
+            <a:spLocks noGrp="1"/>
+          </p:cNvSpPr>
+          <p:nvPr>
+            <p:ph type="body" idx="3" sz="quarter"/>
+          </p:nvPr>
+        </p:nvSpPr>
+        <p:spPr/>
+        <p:txBody>
+          <a:bodyPr/>
+          <a:lstStyle/>
+          <a:p>
+            <a:r>
+              <a:t>【50 秒】</a:t>
+            </a:r>
+          </a:p>
+          <a:p>
+            <a:r>
+              <a:t>这是故事性最强的一页，讲得生动一点。</a:t>
+            </a:r>
+          </a:p>
+          <a:p>
+            <a:r>
+              <a:t>讲法：'我们做 230 道题时发现，错的不是背准则，是不知道怎么套场景——这背后是个真问题。'</a:t>
+            </a:r>
+          </a:p>
+          <a:p>
+            <a:r>
+              <a:t>把一个'备考点'升华为'行业痛点'，是这页的目的，体现'灵感真实、接地气'。</a:t>
+            </a:r>
+          </a:p>
+        </p:txBody>
+      </p:sp>
+      <p:sp>
+        <p:nvSpPr>
+          <p:cNvPr id="4" name="Slide Number Placeholder 3"/>
+          <p:cNvSpPr>
+            <a:spLocks noGrp="1"/>
+          </p:cNvSpPr>
+          <p:nvPr>
+            <p:ph type="sldNum" idx="5" sz="quarter"/>
+          </p:nvPr>
+        </p:nvSpPr>
+        <p:spPr/>
+      </p:sp>
+    </p:spTree>
+  </p:cSld>
+  <p:clrMapOvr>
+    <a:masterClrMapping/>
+  </p:clrMapOvr>
+</p:notes>
+</file>
+
+<file path=ppt/notesSlides/notesSlide4.xml><?xml version="1.0" encoding="utf-8"?>
+<p:notes xmlns:a="http://schemas.openxmlformats.org/drawingml/2006/main" xmlns:p="http://schemas.openxmlformats.org/presentationml/2006/main" xmlns:r="http://schemas.openxmlformats.org/officeDocument/2006/relationships">
+  <p:cSld>
+    <p:spTree>
+      <p:nvGrpSpPr>
+        <p:cNvPr id="1" name=""/>
+        <p:cNvGrpSpPr/>
+        <p:nvPr/>
+      </p:nvGrpSpPr>
+      <p:grpSpPr>
+        <a:xfrm>
+          <a:off x="0" y="0"/>
+          <a:ext cx="0" cy="0"/>
+          <a:chOff x="0" y="0"/>
+          <a:chExt cx="0" cy="0"/>
+        </a:xfrm>
+      </p:grpSpPr>
+      <p:sp>
+        <p:nvSpPr>
+          <p:cNvPr id="2" name="Slide Image Placeholder 1"/>
+          <p:cNvSpPr>
+            <a:spLocks noGrp="1"/>
+          </p:cNvSpPr>
+          <p:nvPr>
+            <p:ph type="sldImg" idx="2"/>
+          </p:nvPr>
+        </p:nvSpPr>
+        <p:spPr/>
+      </p:sp>
+      <p:sp>
+        <p:nvSpPr>
+          <p:cNvPr id="3" name="Notes Placeholder 2"/>
+          <p:cNvSpPr>
+            <a:spLocks noGrp="1"/>
+          </p:cNvSpPr>
+          <p:nvPr>
+            <p:ph type="body" idx="3" sz="quarter"/>
+          </p:nvPr>
+        </p:nvSpPr>
+        <p:spPr/>
+        <p:txBody>
+          <a:bodyPr/>
+          <a:lstStyle/>
+          <a:p>
+            <a:r>
+              <a:t>【50 秒】</a:t>
+            </a:r>
+          </a:p>
+          <a:p>
+            <a:r>
+              <a:t>这页直接回应评委'你们切题吗'的疑问，主动把话说在前面。</a:t>
+            </a:r>
+          </a:p>
+          <a:p>
+            <a:r>
+              <a:t>讲法：'赛道给了场景、能力、标准三把尺子，我们用这三把尺子量自己，每一把都对得上。'</a:t>
+            </a:r>
+          </a:p>
+          <a:p>
+            <a:r>
+              <a:t>评委可能追问，提前把三层对应背熟。</a:t>
+            </a:r>
+          </a:p>
+        </p:txBody>
+      </p:sp>
+      <p:sp>
+        <p:nvSpPr>
+          <p:cNvPr id="4" name="Slide Number Placeholder 3"/>
+          <p:cNvSpPr>
+            <a:spLocks noGrp="1"/>
+          </p:cNvSpPr>
+          <p:nvPr>
+            <p:ph type="sldNum" idx="5" sz="quarter"/>
+          </p:nvPr>
+        </p:nvSpPr>
+        <p:spPr/>
+      </p:sp>
+    </p:spTree>
+  </p:cSld>
+  <p:clrMapOvr>
+    <a:masterClrMapping/>
+  </p:clrMapOvr>
+</p:notes>
+</file>
+
+<file path=ppt/notesSlides/notesSlide5.xml><?xml version="1.0" encoding="utf-8"?>
+<p:notes xmlns:a="http://schemas.openxmlformats.org/drawingml/2006/main" xmlns:p="http://schemas.openxmlformats.org/presentationml/2006/main" xmlns:r="http://schemas.openxmlformats.org/officeDocument/2006/relationships">
+  <p:cSld>
+    <p:spTree>
+      <p:nvGrpSpPr>
+        <p:cNvPr id="1" name=""/>
+        <p:cNvGrpSpPr/>
+        <p:nvPr/>
+      </p:nvGrpSpPr>
+      <p:grpSpPr>
+        <a:xfrm>
+          <a:off x="0" y="0"/>
+          <a:ext cx="0" cy="0"/>
+          <a:chOff x="0" y="0"/>
+          <a:chExt cx="0" cy="0"/>
+        </a:xfrm>
+      </p:grpSpPr>
+      <p:sp>
+        <p:nvSpPr>
+          <p:cNvPr id="2" name="Slide Image Placeholder 1"/>
+          <p:cNvSpPr>
+            <a:spLocks noGrp="1"/>
+          </p:cNvSpPr>
+          <p:nvPr>
+            <p:ph type="sldImg" idx="2"/>
+          </p:nvPr>
+        </p:nvSpPr>
+        <p:spPr/>
+      </p:sp>
+      <p:sp>
+        <p:nvSpPr>
+          <p:cNvPr id="3" name="Notes Placeholder 2"/>
+          <p:cNvSpPr>
+            <a:spLocks noGrp="1"/>
+          </p:cNvSpPr>
+          <p:nvPr>
+            <p:ph type="body" idx="3" sz="quarter"/>
+          </p:nvPr>
+        </p:nvSpPr>
+        <p:spPr/>
+        <p:txBody>
+          <a:bodyPr/>
+          <a:lstStyle/>
+          <a:p>
+            <a:r>
+              <a:t>【45 秒】</a:t>
+            </a:r>
+          </a:p>
+          <a:p>
+            <a:r>
+              <a:t>把痛点讲具体，让评委有画面感。</a:t>
+            </a:r>
+          </a:p>
+          <a:p>
+            <a:r>
+              <a:t>讲法：'员工不是不想合规，是面对抽象准则，不知道该不该、向谁、披露什么。'</a:t>
+            </a:r>
+          </a:p>
+          <a:p>
+            <a:r>
+              <a:t>最后一句点出：'所以我们要做的不只是提示，更是帮他办成。'</a:t>
+            </a:r>
+          </a:p>
+        </p:txBody>
+      </p:sp>
+      <p:sp>
+        <p:nvSpPr>
+          <p:cNvPr id="4" name="Slide Number Placeholder 3"/>
+          <p:cNvSpPr>
+            <a:spLocks noGrp="1"/>
+          </p:cNvSpPr>
+          <p:nvPr>
+            <p:ph type="sldNum" idx="5" sz="quarter"/>
+          </p:nvPr>
+        </p:nvSpPr>
+        <p:spPr/>
+      </p:sp>
+    </p:spTree>
+  </p:cSld>
+  <p:clrMapOvr>
+    <a:masterClrMapping/>
+  </p:clrMapOvr>
+</p:notes>
+</file>
+
+<file path=ppt/notesSlides/notesSlide6.xml><?xml version="1.0" encoding="utf-8"?>
+<p:notes xmlns:a="http://schemas.openxmlformats.org/drawingml/2006/main" xmlns:p="http://schemas.openxmlformats.org/presentationml/2006/main" xmlns:r="http://schemas.openxmlformats.org/officeDocument/2006/relationships">
+  <p:cSld>
+    <p:spTree>
+      <p:nvGrpSpPr>
+        <p:cNvPr id="1" name=""/>
+        <p:cNvGrpSpPr/>
+        <p:nvPr/>
+      </p:nvGrpSpPr>
+      <p:grpSpPr>
+        <a:xfrm>
+          <a:off x="0" y="0"/>
+          <a:ext cx="0" cy="0"/>
+          <a:chOff x="0" y="0"/>
+          <a:chExt cx="0" cy="0"/>
+        </a:xfrm>
+      </p:grpSpPr>
+      <p:sp>
+        <p:nvSpPr>
+          <p:cNvPr id="2" name="Slide Image Placeholder 1"/>
+          <p:cNvSpPr>
+            <a:spLocks noGrp="1"/>
+          </p:cNvSpPr>
+          <p:nvPr>
+            <p:ph type="sldImg" idx="2"/>
+          </p:nvPr>
+        </p:nvSpPr>
+        <p:spPr/>
+      </p:sp>
+      <p:sp>
+        <p:nvSpPr>
+          <p:cNvPr id="3" name="Notes Placeholder 2"/>
+          <p:cNvSpPr>
+            <a:spLocks noGrp="1"/>
+          </p:cNvSpPr>
+          <p:nvPr>
+            <p:ph type="body" idx="3" sz="quarter"/>
+          </p:nvPr>
+        </p:nvSpPr>
+        <p:spPr/>
+        <p:txBody>
+          <a:bodyPr/>
+          <a:lstStyle/>
+          <a:p>
+            <a:r>
+              <a:t>【45 秒】</a:t>
+            </a:r>
+          </a:p>
+          <a:p>
+            <a:r>
+              <a:t>介绍产品形态，点到为止，细节留给演示页。</a:t>
+            </a:r>
+          </a:p>
+          <a:p>
+            <a:r>
+              <a:t>讲法：'它长这样——一个随开随用的网页应用，手机电脑都能用，断网也能用。'</a:t>
+            </a:r>
+          </a:p>
+          <a:p>
+            <a:r>
+              <a:t>为后面的现场演示做铺垫。</a:t>
+            </a:r>
+          </a:p>
+        </p:txBody>
+      </p:sp>
+      <p:sp>
+        <p:nvSpPr>
+          <p:cNvPr id="4" name="Slide Number Placeholder 3"/>
+          <p:cNvSpPr>
+            <a:spLocks noGrp="1"/>
+          </p:cNvSpPr>
+          <p:nvPr>
+            <p:ph type="sldNum" idx="5" sz="quarter"/>
+          </p:nvPr>
+        </p:nvSpPr>
+        <p:spPr/>
+      </p:sp>
+    </p:spTree>
+  </p:cSld>
+  <p:clrMapOvr>
+    <a:masterClrMapping/>
+  </p:clrMapOvr>
+</p:notes>
+</file>
+
+<file path=ppt/notesSlides/notesSlide7.xml><?xml version="1.0" encoding="utf-8"?>
+<p:notes xmlns:a="http://schemas.openxmlformats.org/drawingml/2006/main" xmlns:p="http://schemas.openxmlformats.org/presentationml/2006/main" xmlns:r="http://schemas.openxmlformats.org/officeDocument/2006/relationships">
+  <p:cSld>
+    <p:spTree>
+      <p:nvGrpSpPr>
+        <p:cNvPr id="1" name=""/>
+        <p:cNvGrpSpPr/>
+        <p:nvPr/>
+      </p:nvGrpSpPr>
+      <p:grpSpPr>
+        <a:xfrm>
+          <a:off x="0" y="0"/>
+          <a:ext cx="0" cy="0"/>
+          <a:chOff x="0" y="0"/>
+          <a:chExt cx="0" cy="0"/>
+        </a:xfrm>
+      </p:grpSpPr>
+      <p:sp>
+        <p:nvSpPr>
+          <p:cNvPr id="2" name="Slide Image Placeholder 1"/>
+          <p:cNvSpPr>
+            <a:spLocks noGrp="1"/>
+          </p:cNvSpPr>
+          <p:nvPr>
+            <p:ph type="sldImg" idx="2"/>
+          </p:nvPr>
+        </p:nvSpPr>
+        <p:spPr/>
+      </p:sp>
+      <p:sp>
+        <p:nvSpPr>
+          <p:cNvPr id="3" name="Notes Placeholder 2"/>
+          <p:cNvSpPr>
+            <a:spLocks noGrp="1"/>
+          </p:cNvSpPr>
+          <p:nvPr>
+            <p:ph type="body" idx="3" sz="quarter"/>
+          </p:nvPr>
+        </p:nvSpPr>
+        <p:spPr/>
+        <p:txBody>
+          <a:bodyPr/>
+          <a:lstStyle/>
+          <a:p>
+            <a:r>
+              <a:t>【60 秒】★核心页，务必讲透</a:t>
+            </a:r>
+          </a:p>
+          <a:p>
+            <a:r>
+              <a:t>这页是'切题'最硬的证据。讲法：'赛道要求 Agent 四大能力，我们一个不落——感知、决策、执行、优化，而且全部真实可运行，不是 PPT 概念。'</a:t>
+            </a:r>
+          </a:p>
+          <a:p>
+            <a:r>
+              <a:t>每讲一个能力，可以稍停一下，让评委看到对应关系。</a:t>
+            </a:r>
+          </a:p>
+        </p:txBody>
+      </p:sp>
+      <p:sp>
+        <p:nvSpPr>
+          <p:cNvPr id="4" name="Slide Number Placeholder 3"/>
+          <p:cNvSpPr>
+            <a:spLocks noGrp="1"/>
+          </p:cNvSpPr>
+          <p:nvPr>
+            <p:ph type="sldNum" idx="5" sz="quarter"/>
+          </p:nvPr>
+        </p:nvSpPr>
+        <p:spPr/>
+      </p:sp>
+    </p:spTree>
+  </p:cSld>
+  <p:clrMapOvr>
+    <a:masterClrMapping/>
+  </p:clrMapOvr>
+</p:notes>
+</file>
+
+<file path=ppt/notesSlides/notesSlide8.xml><?xml version="1.0" encoding="utf-8"?>
+<p:notes xmlns:a="http://schemas.openxmlformats.org/drawingml/2006/main" xmlns:p="http://schemas.openxmlformats.org/presentationml/2006/main" xmlns:r="http://schemas.openxmlformats.org/officeDocument/2006/relationships">
+  <p:cSld>
+    <p:spTree>
+      <p:nvGrpSpPr>
+        <p:cNvPr id="1" name=""/>
+        <p:cNvGrpSpPr/>
+        <p:nvPr/>
+      </p:nvGrpSpPr>
+      <p:grpSpPr>
+        <a:xfrm>
+          <a:off x="0" y="0"/>
+          <a:ext cx="0" cy="0"/>
+          <a:chOff x="0" y="0"/>
+          <a:chExt cx="0" cy="0"/>
+        </a:xfrm>
+      </p:grpSpPr>
+      <p:sp>
+        <p:nvSpPr>
+          <p:cNvPr id="2" name="Slide Image Placeholder 1"/>
+          <p:cNvSpPr>
+            <a:spLocks noGrp="1"/>
+          </p:cNvSpPr>
+          <p:nvPr>
+            <p:ph type="sldImg" idx="2"/>
+          </p:nvPr>
+        </p:nvSpPr>
+        <p:spPr/>
+      </p:sp>
+      <p:sp>
+        <p:nvSpPr>
+          <p:cNvPr id="3" name="Notes Placeholder 2"/>
+          <p:cNvSpPr>
+            <a:spLocks noGrp="1"/>
+          </p:cNvSpPr>
+          <p:nvPr>
+            <p:ph type="body" idx="3" sz="quarter"/>
+          </p:nvPr>
+        </p:nvSpPr>
+        <p:spPr/>
+        <p:txBody>
+          <a:bodyPr/>
+          <a:lstStyle/>
+          <a:p>
+            <a:r>
+              <a:t>【45 秒】</a:t>
+            </a:r>
+          </a:p>
+          <a:p>
+            <a:r>
+              <a:t>讲清 Agent 的'价值升维'。</a:t>
+            </a:r>
+          </a:p>
+          <a:p>
+            <a:r>
+              <a:t>讲法：'关键在最后一环——任务执行。一般的 AI 只给建议，我们的 Agent 替你把申报发出去、把留痕存下来。这一步，就是从工具到 Agent 的本质。'</a:t>
+            </a:r>
+          </a:p>
+        </p:txBody>
+      </p:sp>
+      <p:sp>
+        <p:nvSpPr>
+          <p:cNvPr id="4" name="Slide Number Placeholder 3"/>
+          <p:cNvSpPr>
+            <a:spLocks noGrp="1"/>
+          </p:cNvSpPr>
+          <p:nvPr>
+            <p:ph type="sldNum" idx="5" sz="quarter"/>
+          </p:nvPr>
+        </p:nvSpPr>
+        <p:spPr/>
+      </p:sp>
+    </p:spTree>
+  </p:cSld>
+  <p:clrMapOvr>
+    <a:masterClrMapping/>
+  </p:clrMapOvr>
+</p:notes>
+</file>
+
+<file path=ppt/notesSlides/notesSlide9.xml><?xml version="1.0" encoding="utf-8"?>
+<p:notes xmlns:a="http://schemas.openxmlformats.org/drawingml/2006/main" xmlns:p="http://schemas.openxmlformats.org/presentationml/2006/main" xmlns:r="http://schemas.openxmlformats.org/officeDocument/2006/relationships">
+  <p:cSld>
+    <p:spTree>
+      <p:nvGrpSpPr>
+        <p:cNvPr id="1" name=""/>
+        <p:cNvGrpSpPr/>
+        <p:nvPr/>
+      </p:nvGrpSpPr>
+      <p:grpSpPr>
+        <a:xfrm>
+          <a:off x="0" y="0"/>
+          <a:ext cx="0" cy="0"/>
+          <a:chOff x="0" y="0"/>
+          <a:chExt cx="0" cy="0"/>
+        </a:xfrm>
+      </p:grpSpPr>
+      <p:sp>
+        <p:nvSpPr>
+          <p:cNvPr id="2" name="Slide Image Placeholder 1"/>
+          <p:cNvSpPr>
+            <a:spLocks noGrp="1"/>
+          </p:cNvSpPr>
+          <p:nvPr>
+            <p:ph type="sldImg" idx="2"/>
+          </p:nvPr>
+        </p:nvSpPr>
+        <p:spPr/>
+      </p:sp>
+      <p:sp>
+        <p:nvSpPr>
+          <p:cNvPr id="3" name="Notes Placeholder 2"/>
+          <p:cNvSpPr>
+            <a:spLocks noGrp="1"/>
+          </p:cNvSpPr>
+          <p:nvPr>
+            <p:ph type="body" idx="3" sz="quarter"/>
+          </p:nvPr>
+        </p:nvSpPr>
+        <p:spPr/>
+        <p:txBody>
+          <a:bodyPr/>
+          <a:lstStyle/>
+          <a:p>
+            <a:r>
+              <a:t>【50 秒】</a:t>
+            </a:r>
+          </a:p>
+          <a:p>
+            <a:r>
+              <a:t>技术页不要念技术名词，要讲'为什么这么选'。</a:t>
+            </a:r>
+          </a:p>
+          <a:p>
+            <a:r>
+              <a:t>讲法：'我们不裸用大模型，而是用 RAG 让每个结论都有案例兜底；再加规则引擎，没网也能跑。这些设计，都是冲着「安全、可解释、可落地」去的。'</a:t>
+            </a:r>
+          </a:p>
+        </p:txBody>
+      </p:sp>
+      <p:sp>
+        <p:nvSpPr>
+          <p:cNvPr id="4" name="Slide Number Placeholder 3"/>
+          <p:cNvSpPr>
+            <a:spLocks noGrp="1"/>
+          </p:cNvSpPr>
+          <p:nvPr>
+            <p:ph type="sldNum" idx="5" sz="quarter"/>
+          </p:nvPr>
+        </p:nvSpPr>
+        <p:spPr/>
+      </p:sp>
+    </p:spTree>
+  </p:cSld>
+  <p:clrMapOvr>
+    <a:masterClrMapping/>
+  </p:clrMapOvr>
+</p:notes>
 </file>
 
 <file path=ppt/slideLayouts/slideLayout1.xml><?xml version="1.0" encoding="utf-8"?>
@@ -3120,6 +4803,7 @@
           <a:ln>
             <a:noFill/>
           </a:ln>
+          <a:effectLst/>
         </p:spPr>
         <p:style>
           <a:lnRef idx="1">
@@ -3163,6 +4847,7 @@
           <a:ln>
             <a:noFill/>
           </a:ln>
+          <a:effectLst/>
         </p:spPr>
         <p:style>
           <a:lnRef idx="1">
@@ -3194,8 +4879,8 @@
         </p:nvSpPr>
         <p:spPr>
           <a:xfrm>
-            <a:off x="731520" y="1463040"/>
-            <a:ext cx="10698480" cy="2011680"/>
+            <a:off x="731520" y="1371600"/>
+            <a:ext cx="10698480" cy="2194560"/>
           </a:xfrm>
           <a:prstGeom prst="rect">
             <a:avLst/>
@@ -3210,7 +4895,7 @@
           <a:p>
             <a:pPr algn="l"/>
             <a:r>
-              <a:rPr sz="4000" b="1">
+              <a:rPr sz="4200" b="1">
                 <a:solidFill>
                   <a:srgbClr val="FFFFFF"/>
                 </a:solidFill>
@@ -3333,6 +5018,7 @@
           <a:ln>
             <a:noFill/>
           </a:ln>
+          <a:effectLst/>
         </p:spPr>
         <p:style>
           <a:lnRef idx="1">
@@ -3386,7 +5072,7 @@
                 </a:solidFill>
                 <a:latin typeface="微软雅黑"/>
               </a:rPr>
-              <a:t>五大挑战 · 逐一工程化应对</a:t>
+              <a:t>现场演示：从识别到邮件触达的闭环</a:t>
             </a:r>
           </a:p>
         </p:txBody>
@@ -3425,7 +5111,7 @@
                 </a:solidFill>
                 <a:latin typeface="微软雅黑"/>
               </a:rPr>
-              <a:t>• 模型幻觉 → RAG 约束 + 温度 0.3 + 规则引擎兜底</a:t>
+              <a:t>• 输入：客户送我去打高尔夫，还承担我出差的机票和酒店费用</a:t>
             </a:r>
           </a:p>
           <a:p>
@@ -3441,7 +5127,7 @@
                 </a:solidFill>
                 <a:latin typeface="微软雅黑"/>
               </a:rPr>
-              <a:t>• 数据安全 → 离线优先，数据不出本机 + 私有化部署</a:t>
+              <a:t>• ① 高风险判定 + 红色风险拦截 + 准则匹配（I(B)/IV(B)/VI(A)）</a:t>
             </a:r>
           </a:p>
           <a:p>
@@ -3457,7 +5143,7 @@
                 </a:solidFill>
                 <a:latin typeface="微软雅黑"/>
               </a:rPr>
-              <a:t>• 可解释性 → 每个结论附带准则条款与题库案例</a:t>
+              <a:t>• ② 引用题库类似案例（M3-Q30 会议差旅招待）</a:t>
             </a:r>
           </a:p>
           <a:p>
@@ -3473,7 +5159,7 @@
                 </a:solidFill>
                 <a:latin typeface="微软雅黑"/>
               </a:rPr>
-              <a:t>• 权限管理 → 申报留痕、编号可追溯、审批流可扩展</a:t>
+              <a:t>• ③ 生成带唯一编号的申报单</a:t>
             </a:r>
           </a:p>
           <a:p>
@@ -3489,7 +5175,23 @@
                 </a:solidFill>
                 <a:latin typeface="微软雅黑"/>
               </a:rPr>
-              <a:t>• 责任边界 → 辅助决策定位，高风险强制人工确认</a:t>
+              <a:t>• ④ 一键发送邮件 → 合规部门邮箱实时收到</a:t>
+            </a:r>
+          </a:p>
+          <a:p>
+            <a:pPr>
+              <a:spcAft>
+                <a:spcPts val="800"/>
+              </a:spcAft>
+            </a:pPr>
+            <a:r>
+              <a:rPr sz="1800">
+                <a:solidFill>
+                  <a:srgbClr val="1F2A44"/>
+                </a:solidFill>
+                <a:latin typeface="微软雅黑"/>
+              </a:rPr>
+              <a:t>• （现场投屏演示 / 播放录屏视频）</a:t>
             </a:r>
           </a:p>
         </p:txBody>
@@ -3532,6 +5234,7 @@
           <a:ln>
             <a:noFill/>
           </a:ln>
+          <a:effectLst/>
         </p:spPr>
         <p:style>
           <a:lnRef idx="1">
@@ -3585,7 +5288,7 @@
                 </a:solidFill>
                 <a:latin typeface="微软雅黑"/>
               </a:rPr>
-              <a:t>商业模式与落地路径</a:t>
+              <a:t>数据基础与实证结果</a:t>
             </a:r>
           </a:p>
         </p:txBody>
@@ -3624,7 +5327,7 @@
                 </a:solidFill>
                 <a:latin typeface="微软雅黑"/>
               </a:rPr>
-              <a:t>• 三层产品：个人免费 / 团队订阅 / 定制私有化</a:t>
+              <a:t>• 230 道 CFA 题库 · 22 子条款全覆盖 · 8 类行为 · 161 合规案例</a:t>
             </a:r>
           </a:p>
           <a:p>
@@ -3640,23 +5343,55 @@
                 </a:solidFill>
                 <a:latin typeface="微软雅黑"/>
               </a:rPr>
-              <a:t>• 四阶段落地：MVP → 机构试点 → 扩域（软美元/GIPS/反洗钱）→ 规模化</a:t>
-            </a:r>
-          </a:p>
-          <a:p>
-            <a:pPr>
+              <a:t>• 29 项自动化测试全部通过（分类器 / RAG / API）</a:t>
+            </a:r>
+          </a:p>
+          <a:p>
+            <a:pPr lvl="1">
               <a:spcAft>
                 <a:spcPts val="800"/>
               </a:spcAft>
             </a:pPr>
             <a:r>
-              <a:rPr sz="1800">
-                <a:solidFill>
-                  <a:srgbClr val="1F2A44"/>
-                </a:solidFill>
-                <a:latin typeface="微软雅黑"/>
-              </a:rPr>
-              <a:t>• 收入来源：企业订阅 + 私有化授权 + 内容授权 + 培训增值</a:t>
+              <a:rPr sz="1600">
+                <a:solidFill>
+                  <a:srgbClr val="6B7280"/>
+                </a:solidFill>
+                <a:latin typeface="微软雅黑"/>
+              </a:rPr>
+              <a:t>– 收礼招待 → I(B)/IV(B)/VI(A)，引用 M3-Q30</a:t>
+            </a:r>
+          </a:p>
+          <a:p>
+            <a:pPr lvl="1">
+              <a:spcAft>
+                <a:spcPts val="800"/>
+              </a:spcAft>
+            </a:pPr>
+            <a:r>
+              <a:rPr sz="1600">
+                <a:solidFill>
+                  <a:srgbClr val="6B7280"/>
+                </a:solidFill>
+                <a:latin typeface="微软雅黑"/>
+              </a:rPr>
+              <a:t>– 额外报酬 → IV(B)/VI(C)，引用 M3-Q12</a:t>
+            </a:r>
+          </a:p>
+          <a:p>
+            <a:pPr lvl="1">
+              <a:spcAft>
+                <a:spcPts val="800"/>
+              </a:spcAft>
+            </a:pPr>
+            <a:r>
+              <a:rPr sz="1600">
+                <a:solidFill>
+                  <a:srgbClr val="6B7280"/>
+                </a:solidFill>
+                <a:latin typeface="微软雅黑"/>
+              </a:rPr>
+              <a:t>– 无关输入 → 正确返回 uncertain，不误报</a:t>
             </a:r>
           </a:p>
         </p:txBody>
@@ -3699,6 +5434,7 @@
           <a:ln>
             <a:noFill/>
           </a:ln>
+          <a:effectLst/>
         </p:spPr>
         <p:style>
           <a:lnRef idx="1">
@@ -3752,7 +5488,7 @@
                 </a:solidFill>
                 <a:latin typeface="微软雅黑"/>
               </a:rPr>
-              <a:t>创新点与结论</a:t>
+              <a:t>五大挑战 · 逐一工程化应对</a:t>
             </a:r>
           </a:p>
         </p:txBody>
@@ -3791,7 +5527,7 @@
                 </a:solidFill>
                 <a:latin typeface="微软雅黑"/>
               </a:rPr>
-              <a:t>• 创新一：Agent 范式下沉到个人合规行为辅助（而非传统问答）</a:t>
+              <a:t>• 模型幻觉 → RAG 约束 + 温度 0.3 + 规则引擎兜底</a:t>
             </a:r>
           </a:p>
           <a:p>
@@ -3807,7 +5543,7 @@
                 </a:solidFill>
                 <a:latin typeface="微软雅黑"/>
               </a:rPr>
-              <a:t>• 创新二：规则驱动 + 案例引用，保证可解释</a:t>
+              <a:t>• 数据安全 → 离线优先，数据不出本机 + 私有化部署</a:t>
             </a:r>
           </a:p>
           <a:p>
@@ -3823,7 +5559,7 @@
                 </a:solidFill>
                 <a:latin typeface="微软雅黑"/>
               </a:rPr>
-              <a:t>• 创新三：离线优先架构，保证安全可落地</a:t>
+              <a:t>• 可解释性 → 每个结论附带准则条款与题库案例</a:t>
             </a:r>
           </a:p>
           <a:p>
@@ -3839,7 +5575,23 @@
                 </a:solidFill>
                 <a:latin typeface="微软雅黑"/>
               </a:rPr>
-              <a:t>• 结论：把抽象道德准则，变成可执行的合规闭环</a:t>
+              <a:t>• 权限管理 → 申报留痕、编号可追溯、审批流可扩展</a:t>
+            </a:r>
+          </a:p>
+          <a:p>
+            <a:pPr>
+              <a:spcAft>
+                <a:spcPts val="800"/>
+              </a:spcAft>
+            </a:pPr>
+            <a:r>
+              <a:rPr sz="1800">
+                <a:solidFill>
+                  <a:srgbClr val="1F2A44"/>
+                </a:solidFill>
+                <a:latin typeface="微软雅黑"/>
+              </a:rPr>
+              <a:t>• 责任边界 → 辅助决策定位，高风险强制人工确认</a:t>
             </a:r>
           </a:p>
         </p:txBody>
@@ -3882,6 +5634,7 @@
           <a:ln>
             <a:noFill/>
           </a:ln>
+          <a:effectLst/>
         </p:spPr>
         <p:style>
           <a:lnRef idx="1">
@@ -3935,7 +5688,7 @@
                 </a:solidFill>
                 <a:latin typeface="微软雅黑"/>
               </a:rPr>
-              <a:t>团队分工 · 感谢</a:t>
+              <a:t>改进过程：从工具到 Agent 的六次迭代</a:t>
             </a:r>
           </a:p>
         </p:txBody>
@@ -3974,7 +5727,7 @@
                 </a:solidFill>
                 <a:latin typeface="微软雅黑"/>
               </a:rPr>
-              <a:t>• 韩天翼（队长）：项目统筹 + 产品/架构设计 + 核心研发</a:t>
+              <a:t>• ① 数据筑基：230 题结构化，建知识底座</a:t>
             </a:r>
           </a:p>
           <a:p>
@@ -3990,7 +5743,7 @@
                 </a:solidFill>
                 <a:latin typeface="微软雅黑"/>
               </a:rPr>
-              <a:t>• 彭德东：数据工程 + 行业调研 + 实证分析</a:t>
+              <a:t>• ② 感知决策：8 类意图分类 + 风险评级</a:t>
             </a:r>
           </a:p>
           <a:p>
@@ -4006,7 +5759,623 @@
                 </a:solidFill>
                 <a:latin typeface="微软雅黑"/>
               </a:rPr>
-              <a:t>• 禹夏航：系统测试 + 演示材料 + 现场支持</a:t>
+              <a:t>• ③ 可解释：引入 RAG 案例检索</a:t>
+            </a:r>
+          </a:p>
+          <a:p>
+            <a:pPr>
+              <a:spcAft>
+                <a:spcPts val="800"/>
+              </a:spcAft>
+            </a:pPr>
+            <a:r>
+              <a:rPr sz="1800">
+                <a:solidFill>
+                  <a:srgbClr val="1F2A44"/>
+                </a:solidFill>
+                <a:latin typeface="微软雅黑"/>
+              </a:rPr>
+              <a:t>• ④ 关键跃迁：加入任务执行（申报+发邮件），变成 Agent</a:t>
+            </a:r>
+          </a:p>
+          <a:p>
+            <a:pPr>
+              <a:spcAft>
+                <a:spcPts val="800"/>
+              </a:spcAft>
+            </a:pPr>
+            <a:r>
+              <a:rPr sz="1800">
+                <a:solidFill>
+                  <a:srgbClr val="1F2A44"/>
+                </a:solidFill>
+                <a:latin typeface="微软雅黑"/>
+              </a:rPr>
+              <a:t>• ⑤ 完善闭环：风险拦截 + 合规自证</a:t>
+            </a:r>
+          </a:p>
+          <a:p>
+            <a:pPr>
+              <a:spcAft>
+                <a:spcPts val="800"/>
+              </a:spcAft>
+            </a:pPr>
+            <a:r>
+              <a:rPr sz="1800">
+                <a:solidFill>
+                  <a:srgbClr val="1F2A44"/>
+                </a:solidFill>
+                <a:latin typeface="微软雅黑"/>
+              </a:rPr>
+              <a:t>• ⑥ 落地优化：邮件改国内 SMTP + 界面优化 + 演示方案</a:t>
+            </a:r>
+          </a:p>
+        </p:txBody>
+      </p:sp>
+    </p:spTree>
+  </p:cSld>
+  <p:clrMapOvr>
+    <a:masterClrMapping/>
+  </p:clrMapOvr>
+</p:sld>
+</file>
+
+<file path=ppt/slides/slide14.xml><?xml version="1.0" encoding="utf-8"?>
+<p:sld xmlns:a="http://schemas.openxmlformats.org/drawingml/2006/main" xmlns:p="http://schemas.openxmlformats.org/presentationml/2006/main" xmlns:r="http://schemas.openxmlformats.org/officeDocument/2006/relationships">
+  <p:cSld>
+    <p:spTree>
+      <p:nvGrpSpPr>
+        <p:cNvPr id="1" name=""/>
+        <p:cNvGrpSpPr/>
+        <p:nvPr/>
+      </p:nvGrpSpPr>
+      <p:grpSpPr/>
+      <p:sp>
+        <p:nvSpPr>
+          <p:cNvPr id="2" name="Rectangle 1"/>
+          <p:cNvSpPr/>
+          <p:nvPr/>
+        </p:nvSpPr>
+        <p:spPr>
+          <a:xfrm>
+            <a:off x="0" y="0"/>
+            <a:ext cx="12191695" cy="38100"/>
+          </a:xfrm>
+          <a:prstGeom prst="rect">
+            <a:avLst/>
+          </a:prstGeom>
+          <a:solidFill>
+            <a:srgbClr val="D4AF37"/>
+          </a:solidFill>
+          <a:ln>
+            <a:noFill/>
+          </a:ln>
+          <a:effectLst/>
+        </p:spPr>
+        <p:style>
+          <a:lnRef idx="1">
+            <a:schemeClr val="accent1"/>
+          </a:lnRef>
+          <a:fillRef idx="3">
+            <a:schemeClr val="accent1"/>
+          </a:fillRef>
+          <a:effectRef idx="2">
+            <a:schemeClr val="accent1"/>
+          </a:effectRef>
+          <a:fontRef idx="minor">
+            <a:schemeClr val="lt1"/>
+          </a:fontRef>
+        </p:style>
+        <p:txBody>
+          <a:bodyPr rtlCol="0" anchor="ctr"/>
+          <a:lstStyle/>
+          <a:p>
+            <a:pPr algn="ctr"/>
+          </a:p>
+        </p:txBody>
+      </p:sp>
+      <p:sp>
+        <p:nvSpPr>
+          <p:cNvPr id="3" name="TextBox 2"/>
+          <p:cNvSpPr txBox="1"/>
+          <p:nvPr/>
+        </p:nvSpPr>
+        <p:spPr>
+          <a:xfrm>
+            <a:off x="640080" y="320040"/>
+            <a:ext cx="10972800" cy="731520"/>
+          </a:xfrm>
+          <a:prstGeom prst="rect">
+            <a:avLst/>
+          </a:prstGeom>
+          <a:noFill/>
+        </p:spPr>
+        <p:txBody>
+          <a:bodyPr wrap="square" anchor="t">
+            <a:spAutoFit/>
+          </a:bodyPr>
+          <a:lstStyle/>
+          <a:p>
+            <a:pPr algn="l"/>
+            <a:r>
+              <a:rPr sz="2800" b="1">
+                <a:solidFill>
+                  <a:srgbClr val="0E1A33"/>
+                </a:solidFill>
+                <a:latin typeface="微软雅黑"/>
+              </a:rPr>
+              <a:t>使用价值与可推广性</a:t>
+            </a:r>
+          </a:p>
+        </p:txBody>
+      </p:sp>
+      <p:sp>
+        <p:nvSpPr>
+          <p:cNvPr id="4" name="TextBox 3"/>
+          <p:cNvSpPr txBox="1"/>
+          <p:nvPr/>
+        </p:nvSpPr>
+        <p:spPr>
+          <a:xfrm>
+            <a:off x="731520" y="1234440"/>
+            <a:ext cx="10698480" cy="5212080"/>
+          </a:xfrm>
+          <a:prstGeom prst="rect">
+            <a:avLst/>
+          </a:prstGeom>
+          <a:noFill/>
+        </p:spPr>
+        <p:txBody>
+          <a:bodyPr wrap="square">
+            <a:spAutoFit/>
+          </a:bodyPr>
+          <a:lstStyle/>
+          <a:p>
+            <a:pPr>
+              <a:spcAft>
+                <a:spcPts val="800"/>
+              </a:spcAft>
+            </a:pPr>
+            <a:r>
+              <a:rPr sz="1800">
+                <a:solidFill>
+                  <a:srgbClr val="1F2A44"/>
+                </a:solidFill>
+                <a:latin typeface="微软雅黑"/>
+              </a:rPr>
+              <a:t>• 使用价值：员工降风险 · 合规部降成本 · 机构建文化</a:t>
+            </a:r>
+          </a:p>
+          <a:p>
+            <a:pPr>
+              <a:spcAft>
+                <a:spcPts val="800"/>
+              </a:spcAft>
+            </a:pPr>
+            <a:r>
+              <a:rPr sz="1800">
+                <a:solidFill>
+                  <a:srgbClr val="1F2A44"/>
+                </a:solidFill>
+                <a:latin typeface="微软雅黑"/>
+              </a:rPr>
+              <a:t>• 横向：CFA 准则 → 软美元 / GIPS / 反洗钱等更广合规域</a:t>
+            </a:r>
+          </a:p>
+          <a:p>
+            <a:pPr>
+              <a:spcAft>
+                <a:spcPts val="800"/>
+              </a:spcAft>
+            </a:pPr>
+            <a:r>
+              <a:rPr sz="1800">
+                <a:solidFill>
+                  <a:srgbClr val="1F2A44"/>
+                </a:solidFill>
+                <a:latin typeface="微软雅黑"/>
+              </a:rPr>
+              <a:t>• 纵向：同一架构复用于投资研究、风险管理场景</a:t>
+            </a:r>
+          </a:p>
+          <a:p>
+            <a:pPr>
+              <a:spcAft>
+                <a:spcPts val="800"/>
+              </a:spcAft>
+            </a:pPr>
+            <a:r>
+              <a:rPr sz="1800">
+                <a:solidFill>
+                  <a:srgbClr val="1F2A44"/>
+                </a:solidFill>
+                <a:latin typeface="微软雅黑"/>
+              </a:rPr>
+              <a:t>• 多智能体：自检 / 申报 / 审查 / 审计 Agent 协同</a:t>
+            </a:r>
+          </a:p>
+          <a:p>
+            <a:pPr>
+              <a:spcAft>
+                <a:spcPts val="800"/>
+              </a:spcAft>
+            </a:pPr>
+            <a:r>
+              <a:rPr sz="1800">
+                <a:solidFill>
+                  <a:srgbClr val="1F2A44"/>
+                </a:solidFill>
+                <a:latin typeface="微软雅黑"/>
+              </a:rPr>
+              <a:t>• 跨行业：医药、法律、证券等强监管行业可复用</a:t>
+            </a:r>
+          </a:p>
+        </p:txBody>
+      </p:sp>
+    </p:spTree>
+  </p:cSld>
+  <p:clrMapOvr>
+    <a:masterClrMapping/>
+  </p:clrMapOvr>
+</p:sld>
+</file>
+
+<file path=ppt/slides/slide15.xml><?xml version="1.0" encoding="utf-8"?>
+<p:sld xmlns:a="http://schemas.openxmlformats.org/drawingml/2006/main" xmlns:p="http://schemas.openxmlformats.org/presentationml/2006/main" xmlns:r="http://schemas.openxmlformats.org/officeDocument/2006/relationships">
+  <p:cSld>
+    <p:spTree>
+      <p:nvGrpSpPr>
+        <p:cNvPr id="1" name=""/>
+        <p:cNvGrpSpPr/>
+        <p:nvPr/>
+      </p:nvGrpSpPr>
+      <p:grpSpPr/>
+      <p:sp>
+        <p:nvSpPr>
+          <p:cNvPr id="2" name="Rectangle 1"/>
+          <p:cNvSpPr/>
+          <p:nvPr/>
+        </p:nvSpPr>
+        <p:spPr>
+          <a:xfrm>
+            <a:off x="0" y="0"/>
+            <a:ext cx="12191695" cy="38100"/>
+          </a:xfrm>
+          <a:prstGeom prst="rect">
+            <a:avLst/>
+          </a:prstGeom>
+          <a:solidFill>
+            <a:srgbClr val="D4AF37"/>
+          </a:solidFill>
+          <a:ln>
+            <a:noFill/>
+          </a:ln>
+          <a:effectLst/>
+        </p:spPr>
+        <p:style>
+          <a:lnRef idx="1">
+            <a:schemeClr val="accent1"/>
+          </a:lnRef>
+          <a:fillRef idx="3">
+            <a:schemeClr val="accent1"/>
+          </a:fillRef>
+          <a:effectRef idx="2">
+            <a:schemeClr val="accent1"/>
+          </a:effectRef>
+          <a:fontRef idx="minor">
+            <a:schemeClr val="lt1"/>
+          </a:fontRef>
+        </p:style>
+        <p:txBody>
+          <a:bodyPr rtlCol="0" anchor="ctr"/>
+          <a:lstStyle/>
+          <a:p>
+            <a:pPr algn="ctr"/>
+          </a:p>
+        </p:txBody>
+      </p:sp>
+      <p:sp>
+        <p:nvSpPr>
+          <p:cNvPr id="3" name="TextBox 2"/>
+          <p:cNvSpPr txBox="1"/>
+          <p:nvPr/>
+        </p:nvSpPr>
+        <p:spPr>
+          <a:xfrm>
+            <a:off x="640080" y="320040"/>
+            <a:ext cx="10972800" cy="731520"/>
+          </a:xfrm>
+          <a:prstGeom prst="rect">
+            <a:avLst/>
+          </a:prstGeom>
+          <a:noFill/>
+        </p:spPr>
+        <p:txBody>
+          <a:bodyPr wrap="square" anchor="t">
+            <a:spAutoFit/>
+          </a:bodyPr>
+          <a:lstStyle/>
+          <a:p>
+            <a:pPr algn="l"/>
+            <a:r>
+              <a:rPr sz="2800" b="1">
+                <a:solidFill>
+                  <a:srgbClr val="0E1A33"/>
+                </a:solidFill>
+                <a:latin typeface="微软雅黑"/>
+              </a:rPr>
+              <a:t>商业模式与落地路径</a:t>
+            </a:r>
+          </a:p>
+        </p:txBody>
+      </p:sp>
+      <p:sp>
+        <p:nvSpPr>
+          <p:cNvPr id="4" name="TextBox 3"/>
+          <p:cNvSpPr txBox="1"/>
+          <p:nvPr/>
+        </p:nvSpPr>
+        <p:spPr>
+          <a:xfrm>
+            <a:off x="731520" y="1234440"/>
+            <a:ext cx="10698480" cy="5212080"/>
+          </a:xfrm>
+          <a:prstGeom prst="rect">
+            <a:avLst/>
+          </a:prstGeom>
+          <a:noFill/>
+        </p:spPr>
+        <p:txBody>
+          <a:bodyPr wrap="square">
+            <a:spAutoFit/>
+          </a:bodyPr>
+          <a:lstStyle/>
+          <a:p>
+            <a:pPr>
+              <a:spcAft>
+                <a:spcPts val="800"/>
+              </a:spcAft>
+            </a:pPr>
+            <a:r>
+              <a:rPr sz="1800">
+                <a:solidFill>
+                  <a:srgbClr val="1F2A44"/>
+                </a:solidFill>
+                <a:latin typeface="微软雅黑"/>
+              </a:rPr>
+              <a:t>• 三层产品：个人免费 / 团队订阅 / 定制私有化</a:t>
+            </a:r>
+          </a:p>
+          <a:p>
+            <a:pPr>
+              <a:spcAft>
+                <a:spcPts val="800"/>
+              </a:spcAft>
+            </a:pPr>
+            <a:r>
+              <a:rPr sz="1800">
+                <a:solidFill>
+                  <a:srgbClr val="1F2A44"/>
+                </a:solidFill>
+                <a:latin typeface="微软雅黑"/>
+              </a:rPr>
+              <a:t>• 四阶段落地：MVP → 机构试点 → 扩域 → 规模化</a:t>
+            </a:r>
+          </a:p>
+          <a:p>
+            <a:pPr>
+              <a:spcAft>
+                <a:spcPts val="800"/>
+              </a:spcAft>
+            </a:pPr>
+            <a:r>
+              <a:rPr sz="1800">
+                <a:solidFill>
+                  <a:srgbClr val="1F2A44"/>
+                </a:solidFill>
+                <a:latin typeface="微软雅黑"/>
+              </a:rPr>
+              <a:t>• 收入来源：企业订阅 + 私有化授权 + 内容授权 + 培训增值</a:t>
+            </a:r>
+          </a:p>
+        </p:txBody>
+      </p:sp>
+    </p:spTree>
+  </p:cSld>
+  <p:clrMapOvr>
+    <a:masterClrMapping/>
+  </p:clrMapOvr>
+</p:sld>
+</file>
+
+<file path=ppt/slides/slide16.xml><?xml version="1.0" encoding="utf-8"?>
+<p:sld xmlns:a="http://schemas.openxmlformats.org/drawingml/2006/main" xmlns:p="http://schemas.openxmlformats.org/presentationml/2006/main" xmlns:r="http://schemas.openxmlformats.org/officeDocument/2006/relationships">
+  <p:cSld>
+    <p:spTree>
+      <p:nvGrpSpPr>
+        <p:cNvPr id="1" name=""/>
+        <p:cNvGrpSpPr/>
+        <p:nvPr/>
+      </p:nvGrpSpPr>
+      <p:grpSpPr/>
+      <p:sp>
+        <p:nvSpPr>
+          <p:cNvPr id="2" name="Rectangle 1"/>
+          <p:cNvSpPr/>
+          <p:nvPr/>
+        </p:nvSpPr>
+        <p:spPr>
+          <a:xfrm>
+            <a:off x="0" y="0"/>
+            <a:ext cx="12191695" cy="38100"/>
+          </a:xfrm>
+          <a:prstGeom prst="rect">
+            <a:avLst/>
+          </a:prstGeom>
+          <a:solidFill>
+            <a:srgbClr val="D4AF37"/>
+          </a:solidFill>
+          <a:ln>
+            <a:noFill/>
+          </a:ln>
+          <a:effectLst/>
+        </p:spPr>
+        <p:style>
+          <a:lnRef idx="1">
+            <a:schemeClr val="accent1"/>
+          </a:lnRef>
+          <a:fillRef idx="3">
+            <a:schemeClr val="accent1"/>
+          </a:fillRef>
+          <a:effectRef idx="2">
+            <a:schemeClr val="accent1"/>
+          </a:effectRef>
+          <a:fontRef idx="minor">
+            <a:schemeClr val="lt1"/>
+          </a:fontRef>
+        </p:style>
+        <p:txBody>
+          <a:bodyPr rtlCol="0" anchor="ctr"/>
+          <a:lstStyle/>
+          <a:p>
+            <a:pPr algn="ctr"/>
+          </a:p>
+        </p:txBody>
+      </p:sp>
+      <p:sp>
+        <p:nvSpPr>
+          <p:cNvPr id="3" name="TextBox 2"/>
+          <p:cNvSpPr txBox="1"/>
+          <p:nvPr/>
+        </p:nvSpPr>
+        <p:spPr>
+          <a:xfrm>
+            <a:off x="640080" y="320040"/>
+            <a:ext cx="10972800" cy="731520"/>
+          </a:xfrm>
+          <a:prstGeom prst="rect">
+            <a:avLst/>
+          </a:prstGeom>
+          <a:noFill/>
+        </p:spPr>
+        <p:txBody>
+          <a:bodyPr wrap="square" anchor="t">
+            <a:spAutoFit/>
+          </a:bodyPr>
+          <a:lstStyle/>
+          <a:p>
+            <a:pPr algn="l"/>
+            <a:r>
+              <a:rPr sz="2800" b="1">
+                <a:solidFill>
+                  <a:srgbClr val="0E1A33"/>
+                </a:solidFill>
+                <a:latin typeface="微软雅黑"/>
+              </a:rPr>
+              <a:t>创新点 · 团队 · 感谢</a:t>
+            </a:r>
+          </a:p>
+        </p:txBody>
+      </p:sp>
+      <p:sp>
+        <p:nvSpPr>
+          <p:cNvPr id="4" name="TextBox 3"/>
+          <p:cNvSpPr txBox="1"/>
+          <p:nvPr/>
+        </p:nvSpPr>
+        <p:spPr>
+          <a:xfrm>
+            <a:off x="731520" y="1234440"/>
+            <a:ext cx="10698480" cy="5212080"/>
+          </a:xfrm>
+          <a:prstGeom prst="rect">
+            <a:avLst/>
+          </a:prstGeom>
+          <a:noFill/>
+        </p:spPr>
+        <p:txBody>
+          <a:bodyPr wrap="square">
+            <a:spAutoFit/>
+          </a:bodyPr>
+          <a:lstStyle/>
+          <a:p>
+            <a:pPr>
+              <a:spcAft>
+                <a:spcPts val="800"/>
+              </a:spcAft>
+            </a:pPr>
+            <a:r>
+              <a:rPr sz="1800">
+                <a:solidFill>
+                  <a:srgbClr val="1F2A44"/>
+                </a:solidFill>
+                <a:latin typeface="微软雅黑"/>
+              </a:rPr>
+              <a:t>• 创新一：Agent 范式下沉到个人合规行为辅助</a:t>
+            </a:r>
+          </a:p>
+          <a:p>
+            <a:pPr>
+              <a:spcAft>
+                <a:spcPts val="800"/>
+              </a:spcAft>
+            </a:pPr>
+            <a:r>
+              <a:rPr sz="1800">
+                <a:solidFill>
+                  <a:srgbClr val="1F2A44"/>
+                </a:solidFill>
+                <a:latin typeface="微软雅黑"/>
+              </a:rPr>
+              <a:t>• 创新二：规则驱动 + 案例引用，保证可解释</a:t>
+            </a:r>
+          </a:p>
+          <a:p>
+            <a:pPr>
+              <a:spcAft>
+                <a:spcPts val="800"/>
+              </a:spcAft>
+            </a:pPr>
+            <a:r>
+              <a:rPr sz="1800">
+                <a:solidFill>
+                  <a:srgbClr val="1F2A44"/>
+                </a:solidFill>
+                <a:latin typeface="微软雅黑"/>
+              </a:rPr>
+              <a:t>• 创新三：离线优先，保证安全可落地</a:t>
+            </a:r>
+          </a:p>
+          <a:p>
+            <a:pPr>
+              <a:spcAft>
+                <a:spcPts val="800"/>
+              </a:spcAft>
+            </a:pPr>
+            <a:r>
+              <a:rPr sz="1800">
+                <a:solidFill>
+                  <a:srgbClr val="1F2A44"/>
+                </a:solidFill>
+                <a:latin typeface="微软雅黑"/>
+              </a:rPr>
+              <a:t>• </a:t>
+            </a:r>
+          </a:p>
+          <a:p>
+            <a:pPr>
+              <a:spcAft>
+                <a:spcPts val="800"/>
+              </a:spcAft>
+            </a:pPr>
+            <a:r>
+              <a:rPr sz="1800">
+                <a:solidFill>
+                  <a:srgbClr val="1F2A44"/>
+                </a:solidFill>
+                <a:latin typeface="微软雅黑"/>
+              </a:rPr>
+              <a:t>• 韩天翼（队长）：统筹+架构+核心研发 ｜ 彭德东：数据+调研 ｜ 禹夏航：测试+展示</a:t>
             </a:r>
           </a:p>
           <a:p>
@@ -4065,6 +6434,7 @@
           <a:ln>
             <a:noFill/>
           </a:ln>
+          <a:effectLst/>
         </p:spPr>
         <p:style>
           <a:lnRef idx="1">
@@ -4118,7 +6488,7 @@
                 </a:solidFill>
                 <a:latin typeface="微软雅黑"/>
               </a:rPr>
-              <a:t>主题解读：为什么选「合规」场景</a:t>
+              <a:t>执行摘要：一句话 + 三个亮点</a:t>
             </a:r>
           </a:p>
         </p:txBody>
@@ -4157,7 +6527,7 @@
                 </a:solidFill>
                 <a:latin typeface="微软雅黑"/>
               </a:rPr>
-              <a:t>• AI 正从「辅助分析工具」向「智能执行 Agent」范式跃迁</a:t>
+              <a:t>• 一句话：员工用一句话描述行为 → Agent 自动识别准则、评估风险、执行申报</a:t>
             </a:r>
           </a:p>
           <a:p>
@@ -4173,7 +6543,7 @@
                 </a:solidFill>
                 <a:latin typeface="微软雅黑"/>
               </a:rPr>
-              <a:t>– 投资靠判断 · 风控靠数据 · 合规靠规则</a:t>
+              <a:t>– 亮点一：不是问答工具，而是能「执行任务」的 Agent</a:t>
             </a:r>
           </a:p>
           <a:p>
@@ -4189,39 +6559,23 @@
                 </a:solidFill>
                 <a:latin typeface="微软雅黑"/>
               </a:rPr>
-              <a:t>– CFA 准则 22 条子条款是可结构化、可枚举的规则集合</a:t>
-            </a:r>
-          </a:p>
-          <a:p>
-            <a:pPr>
+              <a:t>– 亮点二：RAG 约束，每个结论都有题库案例依据（可解释）</a:t>
+            </a:r>
+          </a:p>
+          <a:p>
+            <a:pPr lvl="1">
               <a:spcAft>
                 <a:spcPts val="800"/>
               </a:spcAft>
             </a:pPr>
             <a:r>
-              <a:rPr sz="1800">
-                <a:solidFill>
-                  <a:srgbClr val="1F2A44"/>
-                </a:solidFill>
-                <a:latin typeface="微软雅黑"/>
-              </a:rPr>
-              <a:t>• 合规场景最适合 Agent 落地：规则解析、制度比对、异常识别、报告生成</a:t>
-            </a:r>
-          </a:p>
-          <a:p>
-            <a:pPr>
-              <a:spcAft>
-                <a:spcPts val="800"/>
-              </a:spcAft>
-            </a:pPr>
-            <a:r>
-              <a:rPr sz="1800">
-                <a:solidFill>
-                  <a:srgbClr val="1F2A44"/>
-                </a:solidFill>
-                <a:latin typeface="微软雅黑"/>
-              </a:rPr>
-              <a:t>• 愿景：构建安全、可靠、可解释、可落地的合规智能体</a:t>
+              <a:rPr sz="1600">
+                <a:solidFill>
+                  <a:srgbClr val="6B7280"/>
+                </a:solidFill>
+                <a:latin typeface="微软雅黑"/>
+              </a:rPr>
+              <a:t>– 亮点三：离线优先 + 邮件触达，真正可落地（安全）</a:t>
             </a:r>
           </a:p>
         </p:txBody>
@@ -4264,6 +6618,7 @@
           <a:ln>
             <a:noFill/>
           </a:ln>
+          <a:effectLst/>
         </p:spPr>
         <p:style>
           <a:lnRef idx="1">
@@ -4317,7 +6672,7 @@
                 </a:solidFill>
                 <a:latin typeface="微软雅黑"/>
               </a:rPr>
-              <a:t>合规管理的三大痛点</a:t>
+              <a:t>灵感来源：从一道题想到一个 Agent</a:t>
             </a:r>
           </a:p>
         </p:txBody>
@@ -4356,7 +6711,7 @@
                 </a:solidFill>
                 <a:latin typeface="微软雅黑"/>
               </a:rPr>
-              <a:t>• 判断门槛高：准则表述开放，一线员工判断因人、因时而异</a:t>
+              <a:t>• 备考 CFA 道德时的真实观察：错题不在「记不住条文」，而在「具体场景如何对号入座」</a:t>
             </a:r>
           </a:p>
           <a:p>
@@ -4372,7 +6727,7 @@
                 </a:solidFill>
                 <a:latin typeface="微软雅黑"/>
               </a:rPr>
-              <a:t>• 披露义务易遗漏：不知道该不该披露、向谁披露、披露什么</a:t>
+              <a:t>• 核心洞察：道德合规的难点不是「知识」，而是「判断」与「行动」</a:t>
             </a:r>
           </a:p>
           <a:p>
@@ -4388,23 +6743,7 @@
                 </a:solidFill>
                 <a:latin typeface="微软雅黑"/>
               </a:rPr>
-              <a:t>• 申报与留痕割裂：传统工具只提示风险，不执行申报</a:t>
-            </a:r>
-          </a:p>
-          <a:p>
-            <a:pPr lvl="1">
-              <a:spcAft>
-                <a:spcPts val="800"/>
-              </a:spcAft>
-            </a:pPr>
-            <a:r>
-              <a:rPr sz="1600">
-                <a:solidFill>
-                  <a:srgbClr val="6B7280"/>
-                </a:solidFill>
-                <a:latin typeface="微软雅黑"/>
-              </a:rPr>
-              <a:t>– 数据佐证：230 题库中准则应用指南占 64.3%，错题集中在客户/雇主责任</a:t>
+              <a:t>• 结合大赛主题：AI 从「回答问题」跃迁为「执行任务」，恰好补上合规缺失的一环</a:t>
             </a:r>
           </a:p>
           <a:p>
@@ -4420,7 +6759,7 @@
                 </a:solidFill>
                 <a:latin typeface="微软雅黑"/>
               </a:rPr>
-              <a:t>• 结论：员工不是不想合规，而是缺少可执行的决策工具</a:t>
+              <a:t>• 于是：把 CFA 准则，变成一个能替你「做完该做的」的 Agent</a:t>
             </a:r>
           </a:p>
         </p:txBody>
@@ -4463,6 +6802,7 @@
           <a:ln>
             <a:noFill/>
           </a:ln>
+          <a:effectLst/>
         </p:spPr>
         <p:style>
           <a:lnRef idx="1">
@@ -4516,7 +6856,7 @@
                 </a:solidFill>
                 <a:latin typeface="微软雅黑"/>
               </a:rPr>
-              <a:t>方案概述：一个能「执行」的合规 Agent</a:t>
+              <a:t>切题程度：三层严格对应</a:t>
             </a:r>
           </a:p>
         </p:txBody>
@@ -4555,7 +6895,7 @@
                 </a:solidFill>
                 <a:latin typeface="微软雅黑"/>
               </a:rPr>
-              <a:t>• 员工用一句话描述行为 → Agent 自动识别准则、评估风险、执行申报</a:t>
+              <a:t>• 场景对应：三大场景选「合规」→ 规则解析/制度比对/异常识别/报告生成</a:t>
             </a:r>
           </a:p>
           <a:p>
@@ -4571,7 +6911,7 @@
                 </a:solidFill>
                 <a:latin typeface="微软雅黑"/>
               </a:rPr>
-              <a:t>• 产品形态：PWA 三视图（自检 / 准则速查 / 历史）+ 申报与自证弹窗</a:t>
+              <a:t>• 能力对应：自主感知/分析决策/任务执行/持续优化，逐条落地</a:t>
             </a:r>
           </a:p>
           <a:p>
@@ -4587,7 +6927,7 @@
                 </a:solidFill>
                 <a:latin typeface="微软雅黑"/>
               </a:rPr>
-              <a:t>• 不是问答机器人，而是能替你干活的 Agent</a:t>
+              <a:t>• 标准对应：准确性/可解释性/安全性/落地能力，逐条满足</a:t>
             </a:r>
           </a:p>
           <a:p>
@@ -4603,7 +6943,7 @@
                 </a:solidFill>
                 <a:latin typeface="微软雅黑"/>
               </a:rPr>
-              <a:t>• 支持语音输入、离线可用、多端适配</a:t>
+              <a:t>• 结论：方案始终紧扣主题，不跑题、可衡量</a:t>
             </a:r>
           </a:p>
         </p:txBody>
@@ -4646,6 +6986,7 @@
           <a:ln>
             <a:noFill/>
           </a:ln>
+          <a:effectLst/>
         </p:spPr>
         <p:style>
           <a:lnRef idx="1">
@@ -4699,7 +7040,7 @@
                 </a:solidFill>
                 <a:latin typeface="微软雅黑"/>
               </a:rPr>
-              <a:t>Agent 四大核心能力 · 逐一落地</a:t>
+              <a:t>合规管理的三大痛点</a:t>
             </a:r>
           </a:p>
         </p:txBody>
@@ -4732,13 +7073,13 @@
               </a:spcAft>
             </a:pPr>
             <a:r>
-              <a:rPr sz="2000">
+              <a:rPr sz="1800">
                 <a:solidFill>
                   <a:srgbClr val="1F2A44"/>
                 </a:solidFill>
                 <a:latin typeface="微软雅黑"/>
               </a:rPr>
-              <a:t>• 自主感知 → 意图识别（关键词 + 正则 + 语义三级）</a:t>
+              <a:t>• 判断门槛高：准则表述开放，一线员工判断因人、因时而异</a:t>
             </a:r>
           </a:p>
           <a:p>
@@ -4748,13 +7089,13 @@
               </a:spcAft>
             </a:pPr>
             <a:r>
-              <a:rPr sz="2000">
+              <a:rPr sz="1800">
                 <a:solidFill>
                   <a:srgbClr val="1F2A44"/>
                 </a:solidFill>
                 <a:latin typeface="微软雅黑"/>
               </a:rPr>
-              <a:t>• 分析决策 → 风险评级 + 22 子条款匹配 + RAG 案例检索</a:t>
+              <a:t>• 披露义务易遗漏：不知道该不该披露、向谁披露、披露什么</a:t>
             </a:r>
           </a:p>
           <a:p>
@@ -4764,45 +7105,29 @@
               </a:spcAft>
             </a:pPr>
             <a:r>
-              <a:rPr sz="2000">
+              <a:rPr sz="1800">
                 <a:solidFill>
                   <a:srgbClr val="1F2A44"/>
                 </a:solidFill>
                 <a:latin typeface="微软雅黑"/>
               </a:rPr>
-              <a:t>• 任务执行 → 生成申报单 + 一键发邮件 + 自证声明</a:t>
-            </a:r>
-          </a:p>
-          <a:p>
-            <a:pPr>
+              <a:t>• 申报与留痕割裂：传统工具只提示风险，不执行申报</a:t>
+            </a:r>
+          </a:p>
+          <a:p>
+            <a:pPr lvl="1">
               <a:spcAft>
                 <a:spcPts val="800"/>
               </a:spcAft>
             </a:pPr>
             <a:r>
-              <a:rPr sz="2000">
-                <a:solidFill>
-                  <a:srgbClr val="1F2A44"/>
-                </a:solidFill>
-                <a:latin typeface="微软雅黑"/>
-              </a:rPr>
-              <a:t>• 持续优化 → 增量知识库 + 结果缓存 + 行为留痕</a:t>
-            </a:r>
-          </a:p>
-          <a:p>
-            <a:pPr>
-              <a:spcAft>
-                <a:spcPts val="800"/>
-              </a:spcAft>
-            </a:pPr>
-            <a:r>
-              <a:rPr sz="1800">
-                <a:solidFill>
-                  <a:srgbClr val="1F2A44"/>
-                </a:solidFill>
-                <a:latin typeface="微软雅黑"/>
-              </a:rPr>
-              <a:t>• 四大能力一个不落，且全部真实可运行</a:t>
+              <a:rPr sz="1600">
+                <a:solidFill>
+                  <a:srgbClr val="6B7280"/>
+                </a:solidFill>
+                <a:latin typeface="微软雅黑"/>
+              </a:rPr>
+              <a:t>– 数据佐证：230 题库中准则应用指南占 64.3%，错题集中在客户/雇主责任</a:t>
             </a:r>
           </a:p>
         </p:txBody>
@@ -4845,6 +7170,7 @@
           <a:ln>
             <a:noFill/>
           </a:ln>
+          <a:effectLst/>
         </p:spPr>
         <p:style>
           <a:lnRef idx="1">
@@ -4898,7 +7224,7 @@
                 </a:solidFill>
                 <a:latin typeface="微软雅黑"/>
               </a:rPr>
-              <a:t>技术架构：RAG 约束，结论有据可依</a:t>
+              <a:t>方案概述：一个能「执行」的合规 Agent</a:t>
             </a:r>
           </a:p>
         </p:txBody>
@@ -4937,23 +7263,7 @@
                 </a:solidFill>
                 <a:latin typeface="微软雅黑"/>
               </a:rPr>
-              <a:t>• 输入 → 意图分类 → 向量检索 Top-5 → 结构化输出 → 任务执行</a:t>
-            </a:r>
-          </a:p>
-          <a:p>
-            <a:pPr lvl="1">
-              <a:spcAft>
-                <a:spcPts val="800"/>
-              </a:spcAft>
-            </a:pPr>
-            <a:r>
-              <a:rPr sz="1600">
-                <a:solidFill>
-                  <a:srgbClr val="6B7280"/>
-                </a:solidFill>
-                <a:latin typeface="微软雅黑"/>
-              </a:rPr>
-              <a:t>– 技术栈：FastAPI + ChromaDB + RAG + PWA + SMTP</a:t>
+              <a:t>• 员工用一句话描述行为 → Agent 自动识别准则、评估风险、执行申报</a:t>
             </a:r>
           </a:p>
           <a:p>
@@ -4969,7 +7279,7 @@
                 </a:solidFill>
                 <a:latin typeface="微软雅黑"/>
               </a:rPr>
-              <a:t>• 关键决策一：RAG 约束而非裸 LLM（案例为依据，抑制幻觉）</a:t>
+              <a:t>• 产品形态：PWA 三视图（自检 / 准则速查 / 历史）+ 申报与自证弹窗</a:t>
             </a:r>
           </a:p>
           <a:p>
@@ -4985,7 +7295,7 @@
                 </a:solidFill>
                 <a:latin typeface="微软雅黑"/>
               </a:rPr>
-              <a:t>• 关键决策二：规则引擎兜底（没网、没 API 也能用）</a:t>
+              <a:t>• 支持语音输入、离线可用、多端适配</a:t>
             </a:r>
           </a:p>
           <a:p>
@@ -5001,7 +7311,7 @@
                 </a:solidFill>
                 <a:latin typeface="微软雅黑"/>
               </a:rPr>
-              <a:t>• 关键决策三：离线优先（数据不出本机，安全可落地）</a:t>
+              <a:t>• 关键定位：不是问答机器人，而是能替你干活的 Agent</a:t>
             </a:r>
           </a:p>
         </p:txBody>
@@ -5044,6 +7354,7 @@
           <a:ln>
             <a:noFill/>
           </a:ln>
+          <a:effectLst/>
         </p:spPr>
         <p:style>
           <a:lnRef idx="1">
@@ -5097,7 +7408,7 @@
                 </a:solidFill>
                 <a:latin typeface="微软雅黑"/>
               </a:rPr>
-              <a:t>现场演示：从识别到邮件触达的闭环</a:t>
+              <a:t>Agent 四大核心能力 · 逐一落地</a:t>
             </a:r>
           </a:p>
         </p:txBody>
@@ -5130,13 +7441,13 @@
               </a:spcAft>
             </a:pPr>
             <a:r>
-              <a:rPr sz="1800">
+              <a:rPr sz="2000">
                 <a:solidFill>
                   <a:srgbClr val="1F2A44"/>
                 </a:solidFill>
                 <a:latin typeface="微软雅黑"/>
               </a:rPr>
-              <a:t>• 输入：客户送我去打高尔夫，还承担我出差的机票和酒店费用</a:t>
+              <a:t>• 自主感知 → 意图识别（关键词 + 正则 + 语义三级）</a:t>
             </a:r>
           </a:p>
           <a:p>
@@ -5146,13 +7457,13 @@
               </a:spcAft>
             </a:pPr>
             <a:r>
-              <a:rPr sz="1800">
+              <a:rPr sz="2000">
                 <a:solidFill>
                   <a:srgbClr val="1F2A44"/>
                 </a:solidFill>
                 <a:latin typeface="微软雅黑"/>
               </a:rPr>
-              <a:t>• ① 高风险判定 + 红色风险拦截 + 准则匹配（I(B)/IV(B)/VI(A)）</a:t>
+              <a:t>• 分析决策 → 风险评级 + 22 子条款匹配 + RAG 案例检索</a:t>
             </a:r>
           </a:p>
           <a:p>
@@ -5162,13 +7473,13 @@
               </a:spcAft>
             </a:pPr>
             <a:r>
-              <a:rPr sz="1800">
+              <a:rPr sz="2000">
                 <a:solidFill>
                   <a:srgbClr val="1F2A44"/>
                 </a:solidFill>
                 <a:latin typeface="微软雅黑"/>
               </a:rPr>
-              <a:t>• ② 引用题库类似案例（M3-Q30 会议差旅招待）</a:t>
+              <a:t>• 任务执行 → 生成申报单 + 一键发邮件 + 自证声明</a:t>
             </a:r>
           </a:p>
           <a:p>
@@ -5178,13 +7489,13 @@
               </a:spcAft>
             </a:pPr>
             <a:r>
-              <a:rPr sz="1800">
+              <a:rPr sz="2000">
                 <a:solidFill>
                   <a:srgbClr val="1F2A44"/>
                 </a:solidFill>
                 <a:latin typeface="微软雅黑"/>
               </a:rPr>
-              <a:t>• ③ 生成带唯一编号的申报单</a:t>
+              <a:t>• 持续优化 → 增量知识库 + 结果缓存 + 行为留痕</a:t>
             </a:r>
           </a:p>
           <a:p>
@@ -5200,23 +7511,7 @@
                 </a:solidFill>
                 <a:latin typeface="微软雅黑"/>
               </a:rPr>
-              <a:t>• ④ 一键发送邮件 → 合规部门邮箱实时收到</a:t>
-            </a:r>
-          </a:p>
-          <a:p>
-            <a:pPr>
-              <a:spcAft>
-                <a:spcPts val="800"/>
-              </a:spcAft>
-            </a:pPr>
-            <a:r>
-              <a:rPr sz="1800">
-                <a:solidFill>
-                  <a:srgbClr val="1F2A44"/>
-                </a:solidFill>
-                <a:latin typeface="微软雅黑"/>
-              </a:rPr>
-              <a:t>• （现场投屏演示 / 播放录屏视频）</a:t>
+              <a:t>• 四大能力一个不落，且全部真实可运行</a:t>
             </a:r>
           </a:p>
         </p:txBody>
@@ -5259,6 +7554,7 @@
           <a:ln>
             <a:noFill/>
           </a:ln>
+          <a:effectLst/>
         </p:spPr>
         <p:style>
           <a:lnRef idx="1">
@@ -5312,7 +7608,7 @@
                 </a:solidFill>
                 <a:latin typeface="微软雅黑"/>
               </a:rPr>
-              <a:t>数据基础：权威、规范、可追溯</a:t>
+              <a:t>Agent 起到了什么作用</a:t>
             </a:r>
           </a:p>
         </p:txBody>
@@ -5351,7 +7647,7 @@
                 </a:solidFill>
                 <a:latin typeface="微软雅黑"/>
               </a:rPr>
-              <a:t>• 230 道 CFA 一级道德题库（中英对照，含答案解析）</a:t>
+              <a:t>• 对员工：从「凭感觉」到「有依据」，一句话换来判断+清单+申报单</a:t>
             </a:r>
           </a:p>
           <a:p>
@@ -5367,7 +7663,7 @@
                 </a:solidFill>
                 <a:latin typeface="微软雅黑"/>
               </a:rPr>
-              <a:t>• 22 条子条款全覆盖 · 8 类行为 · 161 个合规案例</a:t>
+              <a:t>• 对合规部门：从「被动审查」到「主动申报+留痕可查」</a:t>
             </a:r>
           </a:p>
           <a:p>
@@ -5383,7 +7679,7 @@
                 </a:solidFill>
                 <a:latin typeface="微软雅黑"/>
               </a:rPr>
-              <a:t>• 数据工程：PDF → 结构化字段（题号/准则/情景/标签/风险/动作）</a:t>
+              <a:t>• 对机构：合规知识沉淀为统一底座，降本增效</a:t>
             </a:r>
           </a:p>
           <a:p>
@@ -5399,7 +7695,7 @@
                 </a:solidFill>
                 <a:latin typeface="微软雅黑"/>
               </a:rPr>
-              <a:t>• 风险等级由准则映射 + 案例加权综合判定</a:t>
+              <a:t>• 对行业：证明「规则驱动+案例约束+任务执行」范式可行</a:t>
             </a:r>
           </a:p>
         </p:txBody>
@@ -5442,6 +7738,7 @@
           <a:ln>
             <a:noFill/>
           </a:ln>
+          <a:effectLst/>
         </p:spPr>
         <p:style>
           <a:lnRef idx="1">
@@ -5495,7 +7792,7 @@
                 </a:solidFill>
                 <a:latin typeface="微软雅黑"/>
               </a:rPr>
-              <a:t>实证结果：测得过、跑得稳</a:t>
+              <a:t>技术架构：RAG 约束，结论有据可依</a:t>
             </a:r>
           </a:p>
         </p:txBody>
@@ -5534,7 +7831,7 @@
                 </a:solidFill>
                 <a:latin typeface="微软雅黑"/>
               </a:rPr>
-              <a:t>• 29 项自动化测试全部通过（分类器 / RAG / API）</a:t>
+              <a:t>• 输入 → 意图分类 → 向量检索 Top-5 → 结构化输出 → 任务执行</a:t>
             </a:r>
           </a:p>
           <a:p>
@@ -5550,39 +7847,55 @@
                 </a:solidFill>
                 <a:latin typeface="微软雅黑"/>
               </a:rPr>
-              <a:t>– 收礼招待 → I(B)/IV(B)/VI(A)，引用 M3-Q30</a:t>
-            </a:r>
-          </a:p>
-          <a:p>
-            <a:pPr lvl="1">
+              <a:t>– 技术栈：FastAPI + ChromaDB + RAG + PWA + SMTP</a:t>
+            </a:r>
+          </a:p>
+          <a:p>
+            <a:pPr>
               <a:spcAft>
                 <a:spcPts val="800"/>
               </a:spcAft>
             </a:pPr>
             <a:r>
-              <a:rPr sz="1600">
-                <a:solidFill>
-                  <a:srgbClr val="6B7280"/>
-                </a:solidFill>
-                <a:latin typeface="微软雅黑"/>
-              </a:rPr>
-              <a:t>– 额外报酬 → IV(B)/VI(C)，引用 M3-Q12</a:t>
-            </a:r>
-          </a:p>
-          <a:p>
-            <a:pPr lvl="1">
+              <a:rPr sz="1800">
+                <a:solidFill>
+                  <a:srgbClr val="1F2A44"/>
+                </a:solidFill>
+                <a:latin typeface="微软雅黑"/>
+              </a:rPr>
+              <a:t>• 决策一：RAG 约束而非裸 LLM（案例为依据，抑制幻觉）</a:t>
+            </a:r>
+          </a:p>
+          <a:p>
+            <a:pPr>
               <a:spcAft>
                 <a:spcPts val="800"/>
               </a:spcAft>
             </a:pPr>
             <a:r>
-              <a:rPr sz="1600">
-                <a:solidFill>
-                  <a:srgbClr val="6B7280"/>
-                </a:solidFill>
-                <a:latin typeface="微软雅黑"/>
-              </a:rPr>
-              <a:t>– 无关输入 → 正确返回 uncertain，不误报</a:t>
+              <a:rPr sz="1800">
+                <a:solidFill>
+                  <a:srgbClr val="1F2A44"/>
+                </a:solidFill>
+                <a:latin typeface="微软雅黑"/>
+              </a:rPr>
+              <a:t>• 决策二：规则引擎兜底（没网、没 API 也能用）</a:t>
+            </a:r>
+          </a:p>
+          <a:p>
+            <a:pPr>
+              <a:spcAft>
+                <a:spcPts val="800"/>
+              </a:spcAft>
+            </a:pPr>
+            <a:r>
+              <a:rPr sz="1800">
+                <a:solidFill>
+                  <a:srgbClr val="1F2A44"/>
+                </a:solidFill>
+                <a:latin typeface="微软雅黑"/>
+              </a:rPr>
+              <a:t>• 决策三：离线优先（数据不出本机，安全可落地）</a:t>
             </a:r>
           </a:p>
         </p:txBody>
@@ -5913,4 +8226,324 @@
   </a:objectDefaults>
   <a:extraClrSchemeLst/>
 </a:theme>
+</file>
+
+<file path=ppt/theme/theme2.xml><?xml version="1.0" encoding="utf-8"?>
+<a:theme xmlns:a="http://schemas.openxmlformats.org/drawingml/2006/main" name="Office Theme">
+  <a:themeElements>
+    <a:clrScheme name="Office">
+      <a:dk1>
+        <a:sysClr val="windowText" lastClr="000000"/>
+      </a:dk1>
+      <a:lt1>
+        <a:sysClr val="window" lastClr="FFFFFF"/>
+      </a:lt1>
+      <a:dk2>
+        <a:srgbClr val="1F497D"/>
+      </a:dk2>
+      <a:lt2>
+        <a:srgbClr val="EEECE1"/>
+      </a:lt2>
+      <a:accent1>
+        <a:srgbClr val="4F81BD"/>
+      </a:accent1>
+      <a:accent2>
+        <a:srgbClr val="C0504D"/>
+      </a:accent2>
+      <a:accent3>
+        <a:srgbClr val="9BBB59"/>
+      </a:accent3>
+      <a:accent4>
+        <a:srgbClr val="8064A2"/>
+      </a:accent4>
+      <a:accent5>
+        <a:srgbClr val="4BACC6"/>
+      </a:accent5>
+      <a:accent6>
+        <a:srgbClr val="F79646"/>
+      </a:accent6>
+      <a:hlink>
+        <a:srgbClr val="0000FF"/>
+      </a:hlink>
+      <a:folHlink>
+        <a:srgbClr val="800080"/>
+      </a:folHlink>
+    </a:clrScheme>
+    <a:fontScheme name="Office">
+      <a:majorFont>
+        <a:latin typeface="Calibri"/>
+        <a:ea typeface=""/>
+        <a:cs typeface=""/>
+        <a:font script="Jpan" typeface="ＭＳ Ｐゴシック"/>
+        <a:font script="Hang" typeface="맑은 고딕"/>
+        <a:font script="Hans" typeface="宋体"/>
+        <a:font script="Hant" typeface="新細明體"/>
+        <a:font script="Arab" typeface="Times New Roman"/>
+        <a:font script="Hebr" typeface="Times New Roman"/>
+        <a:font script="Thai" typeface="Angsana New"/>
+        <a:font script="Ethi" typeface="Nyala"/>
+        <a:font script="Beng" typeface="Vrinda"/>
+        <a:font script="Gujr" typeface="Shruti"/>
+        <a:font script="Khmr" typeface="MoolBoran"/>
+        <a:font script="Knda" typeface="Tunga"/>
+        <a:font script="Guru" typeface="Raavi"/>
+        <a:font script="Cans" typeface="Euphemia"/>
+        <a:font script="Cher" typeface="Plantagenet Cherokee"/>
+        <a:font script="Yiii" typeface="Microsoft Yi Baiti"/>
+        <a:font script="Tibt" typeface="Microsoft Himalaya"/>
+        <a:font script="Thaa" typeface="MV Boli"/>
+        <a:font script="Deva" typeface="Mangal"/>
+        <a:font script="Telu" typeface="Gautami"/>
+        <a:font script="Taml" typeface="Latha"/>
+        <a:font script="Syrc" typeface="Estrangelo Edessa"/>
+        <a:font script="Orya" typeface="Kalinga"/>
+        <a:font script="Mlym" typeface="Kartika"/>
+        <a:font script="Laoo" typeface="DokChampa"/>
+        <a:font script="Sinh" typeface="Iskoola Pota"/>
+        <a:font script="Mong" typeface="Mongolian Baiti"/>
+        <a:font script="Viet" typeface="Times New Roman"/>
+        <a:font script="Uigh" typeface="Microsoft Uighur"/>
+        <a:font script="Geor" typeface="Sylfaen"/>
+      </a:majorFont>
+      <a:minorFont>
+        <a:latin typeface="Calibri"/>
+        <a:ea typeface=""/>
+        <a:cs typeface=""/>
+        <a:font script="Jpan" typeface="ＭＳ Ｐゴシック"/>
+        <a:font script="Hang" typeface="맑은 고딕"/>
+        <a:font script="Hans" typeface="宋体"/>
+        <a:font script="Hant" typeface="新細明體"/>
+        <a:font script="Arab" typeface="Arial"/>
+        <a:font script="Hebr" typeface="Arial"/>
+        <a:font script="Thai" typeface="Cordia New"/>
+        <a:font script="Ethi" typeface="Nyala"/>
+        <a:font script="Beng" typeface="Vrinda"/>
+        <a:font script="Gujr" typeface="Shruti"/>
+        <a:font script="Khmr" typeface="DaunPenh"/>
+        <a:font script="Knda" typeface="Tunga"/>
+        <a:font script="Guru" typeface="Raavi"/>
+        <a:font script="Cans" typeface="Euphemia"/>
+        <a:font script="Cher" typeface="Plantagenet Cherokee"/>
+        <a:font script="Yiii" typeface="Microsoft Yi Baiti"/>
+        <a:font script="Tibt" typeface="Microsoft Himalaya"/>
+        <a:font script="Thaa" typeface="MV Boli"/>
+        <a:font script="Deva" typeface="Mangal"/>
+        <a:font script="Telu" typeface="Gautami"/>
+        <a:font script="Taml" typeface="Latha"/>
+        <a:font script="Syrc" typeface="Estrangelo Edessa"/>
+        <a:font script="Orya" typeface="Kalinga"/>
+        <a:font script="Mlym" typeface="Kartika"/>
+        <a:font script="Laoo" typeface="DokChampa"/>
+        <a:font script="Sinh" typeface="Iskoola Pota"/>
+        <a:font script="Mong" typeface="Mongolian Baiti"/>
+        <a:font script="Viet" typeface="Arial"/>
+        <a:font script="Uigh" typeface="Microsoft Uighur"/>
+        <a:font script="Geor" typeface="Sylfaen"/>
+      </a:minorFont>
+    </a:fontScheme>
+    <a:fmtScheme name="Office">
+      <a:fillStyleLst>
+        <a:solidFill>
+          <a:schemeClr val="phClr"/>
+        </a:solidFill>
+        <a:gradFill rotWithShape="1">
+          <a:gsLst>
+            <a:gs pos="0">
+              <a:schemeClr val="phClr">
+                <a:tint val="50000"/>
+                <a:satMod val="300000"/>
+              </a:schemeClr>
+            </a:gs>
+            <a:gs pos="35000">
+              <a:schemeClr val="phClr">
+                <a:tint val="37000"/>
+                <a:satMod val="300000"/>
+              </a:schemeClr>
+            </a:gs>
+            <a:gs pos="100000">
+              <a:schemeClr val="phClr">
+                <a:tint val="15000"/>
+                <a:satMod val="350000"/>
+              </a:schemeClr>
+            </a:gs>
+          </a:gsLst>
+          <a:lin ang="16200000" scaled="1"/>
+        </a:gradFill>
+        <a:gradFill rotWithShape="1">
+          <a:gsLst>
+            <a:gs pos="0">
+              <a:schemeClr val="phClr">
+                <a:tint val="100000"/>
+                <a:shade val="100000"/>
+                <a:satMod val="130000"/>
+              </a:schemeClr>
+            </a:gs>
+            <a:gs pos="100000">
+              <a:schemeClr val="phClr">
+                <a:tint val="50000"/>
+                <a:shade val="100000"/>
+                <a:satMod val="350000"/>
+              </a:schemeClr>
+            </a:gs>
+          </a:gsLst>
+          <a:lin ang="16200000" scaled="0"/>
+        </a:gradFill>
+      </a:fillStyleLst>
+      <a:lnStyleLst>
+        <a:ln w="9525" cap="flat" cmpd="sng" algn="ctr">
+          <a:solidFill>
+            <a:schemeClr val="phClr">
+              <a:shade val="95000"/>
+              <a:satMod val="105000"/>
+            </a:schemeClr>
+          </a:solidFill>
+          <a:prstDash val="solid"/>
+        </a:ln>
+        <a:ln w="25400" cap="flat" cmpd="sng" algn="ctr">
+          <a:solidFill>
+            <a:schemeClr val="phClr"/>
+          </a:solidFill>
+          <a:prstDash val="solid"/>
+        </a:ln>
+        <a:ln w="38100" cap="flat" cmpd="sng" algn="ctr">
+          <a:solidFill>
+            <a:schemeClr val="phClr"/>
+          </a:solidFill>
+          <a:prstDash val="solid"/>
+        </a:ln>
+      </a:lnStyleLst>
+      <a:effectStyleLst>
+        <a:effectStyle>
+          <a:effectLst>
+            <a:outerShdw blurRad="40000" dist="20000" dir="5400000" rotWithShape="0">
+              <a:srgbClr val="000000">
+                <a:alpha val="38000"/>
+              </a:srgbClr>
+            </a:outerShdw>
+          </a:effectLst>
+        </a:effectStyle>
+        <a:effectStyle>
+          <a:effectLst>
+            <a:outerShdw blurRad="40000" dist="23000" dir="5400000" rotWithShape="0">
+              <a:srgbClr val="000000">
+                <a:alpha val="35000"/>
+              </a:srgbClr>
+            </a:outerShdw>
+          </a:effectLst>
+        </a:effectStyle>
+        <a:effectStyle>
+          <a:effectLst>
+            <a:outerShdw blurRad="40000" dist="23000" dir="5400000" rotWithShape="0">
+              <a:srgbClr val="000000">
+                <a:alpha val="35000"/>
+              </a:srgbClr>
+            </a:outerShdw>
+          </a:effectLst>
+          <a:scene3d>
+            <a:camera prst="orthographicFront">
+              <a:rot lat="0" lon="0" rev="0"/>
+            </a:camera>
+            <a:lightRig rig="threePt" dir="t">
+              <a:rot lat="0" lon="0" rev="1200000"/>
+            </a:lightRig>
+          </a:scene3d>
+          <a:sp3d>
+            <a:bevelT w="63500" h="25400"/>
+          </a:sp3d>
+        </a:effectStyle>
+      </a:effectStyleLst>
+      <a:bgFillStyleLst>
+        <a:solidFill>
+          <a:schemeClr val="phClr"/>
+        </a:solidFill>
+        <a:gradFill rotWithShape="1">
+          <a:gsLst>
+            <a:gs pos="0">
+              <a:schemeClr val="phClr">
+                <a:tint val="40000"/>
+                <a:satMod val="350000"/>
+              </a:schemeClr>
+            </a:gs>
+            <a:gs pos="40000">
+              <a:schemeClr val="phClr">
+                <a:tint val="45000"/>
+                <a:shade val="99000"/>
+                <a:satMod val="350000"/>
+              </a:schemeClr>
+            </a:gs>
+            <a:gs pos="100000">
+              <a:schemeClr val="phClr">
+                <a:shade val="20000"/>
+                <a:satMod val="255000"/>
+              </a:schemeClr>
+            </a:gs>
+          </a:gsLst>
+          <a:path path="circle">
+            <a:fillToRect l="50000" t="-80000" r="50000" b="180000"/>
+          </a:path>
+        </a:gradFill>
+        <a:gradFill rotWithShape="1">
+          <a:gsLst>
+            <a:gs pos="0">
+              <a:schemeClr val="phClr">
+                <a:tint val="80000"/>
+                <a:satMod val="300000"/>
+              </a:schemeClr>
+            </a:gs>
+            <a:gs pos="100000">
+              <a:schemeClr val="phClr">
+                <a:shade val="30000"/>
+                <a:satMod val="200000"/>
+              </a:schemeClr>
+            </a:gs>
+          </a:gsLst>
+          <a:path path="circle">
+            <a:fillToRect l="50000" t="50000" r="50000" b="50000"/>
+          </a:path>
+        </a:gradFill>
+      </a:bgFillStyleLst>
+    </a:fmtScheme>
+  </a:themeElements>
+  <a:objectDefaults>
+    <a:spDef>
+      <a:spPr/>
+      <a:bodyPr/>
+      <a:lstStyle/>
+      <a:style>
+        <a:lnRef idx="1">
+          <a:schemeClr val="accent1"/>
+        </a:lnRef>
+        <a:fillRef idx="3">
+          <a:schemeClr val="accent1"/>
+        </a:fillRef>
+        <a:effectRef idx="2">
+          <a:schemeClr val="accent1"/>
+        </a:effectRef>
+        <a:fontRef idx="minor">
+          <a:schemeClr val="lt1"/>
+        </a:fontRef>
+      </a:style>
+    </a:spDef>
+    <a:lnDef>
+      <a:spPr/>
+      <a:bodyPr/>
+      <a:lstStyle/>
+      <a:style>
+        <a:lnRef idx="2">
+          <a:schemeClr val="accent1"/>
+        </a:lnRef>
+        <a:fillRef idx="0">
+          <a:schemeClr val="accent1"/>
+        </a:fillRef>
+        <a:effectRef idx="1">
+          <a:schemeClr val="accent1"/>
+        </a:effectRef>
+        <a:fontRef idx="minor">
+          <a:schemeClr val="tx1"/>
+        </a:fontRef>
+      </a:style>
+    </a:lnDef>
+  </a:objectDefaults>
+  <a:extraClrSchemeLst/>
+</a:theme>
 </file>
--- a/商策PPT_暑假不回家队.pptx
+++ b/商策PPT_暑假不回家队.pptx
@@ -797,7 +797,7 @@
           <a:lstStyle/>
           <a:p>
             <a:r>
-              <a:t>【50 秒】呼应'持续优化'。'我们没有一步到位，而是六次迭代，第四步是质变——加上任务执行，它才真正从工具变成 Agent。持续优化不是口号，是我们实际走过的路。'</a:t>
+              <a:t>【50 秒】呼应'持续优化'。'我们经历了六次迭代：第四步加上任务执行，从工具变成 Agent；第六步上线合规审批，落地了多智能体协同。持续优化不是口号，是我们实际走过的路。'</a:t>
             </a:r>
           </a:p>
         </p:txBody>
@@ -1497,7 +1497,7 @@
           <a:lstStyle/>
           <a:p>
             <a:r>
-              <a:t>【45 秒】讲价值升维。'关键在任务执行——一般的 AI 只给建议，我们的 Agent 替你把申报发出去、把留痕存下来。这一步，就是从工具到 Agent 的本质。'</a:t>
+              <a:t>【45 秒】讲价值升维。'关键在任务执行——一般的 AI 只给建议，我们的 Agent 替你把申报发出去、把审批做完、把留痕存下来。员工和合规部是两套独立视角，这就是多智能体协同。'</a:t>
             </a:r>
           </a:p>
         </p:txBody>
@@ -7927,7 +7927,7 @@
                 </a:solidFill>
                 <a:latin typeface="微软雅黑"/>
               </a:rPr>
-              <a:t>申报留痕、编号可追溯、审批流可扩展</a:t>
+              <a:t>员工提交→合规签名审批→回执留痕，二次确认</a:t>
             </a:r>
           </a:p>
         </p:txBody>
@@ -8532,7 +8532,7 @@
                 </a:solidFill>
                 <a:latin typeface="微软雅黑"/>
               </a:rPr>
-              <a:t>意图分类+评级</a:t>
+              <a:t>9类分类+评级</a:t>
             </a:r>
           </a:p>
         </p:txBody>
@@ -9030,7 +9030,7 @@
                 </a:solidFill>
                 <a:latin typeface="微软雅黑"/>
               </a:rPr>
-              <a:t>拦截+自证</a:t>
+              <a:t>拦截+自证+转写</a:t>
             </a:r>
           </a:p>
         </p:txBody>
@@ -9177,7 +9177,7 @@
                 </a:solidFill>
                 <a:latin typeface="微软雅黑"/>
               </a:rPr>
-              <a:t>⑥ 落地优化</a:t>
+              <a:t>⑥ 多智能体</a:t>
             </a:r>
           </a:p>
           <a:p>
@@ -9196,7 +9196,7 @@
                 </a:solidFill>
                 <a:latin typeface="微软雅黑"/>
               </a:rPr>
-              <a:t>国内SMTP+演示</a:t>
+              <a:t>合规审批+回执</a:t>
             </a:r>
           </a:p>
         </p:txBody>
@@ -9318,7 +9318,7 @@
                 </a:solidFill>
                 <a:latin typeface="微软雅黑"/>
               </a:rPr>
-              <a:t>第 ④ 步是质变：加上「任务执行」，它才从工具真正变成 Agent</a:t>
+              <a:t>第 ④ 步是质变（工具→Agent），第 ⑥ 步落地多智能体协同（审查 Agent）</a:t>
             </a:r>
           </a:p>
         </p:txBody>
@@ -14710,7 +14710,7 @@
                 </a:solidFill>
                 <a:latin typeface="微软雅黑"/>
               </a:rPr>
-              <a:t>PWA 三视图（自检 / 准则速查 / 历史）+ 申报与自证弹窗</a:t>
+              <a:t>PWA 四视图（自检 / 准则速查 / 历史 / 合规部）+ 申报·自证·审批弹窗</a:t>
             </a:r>
           </a:p>
           <a:p>
@@ -14729,7 +14729,7 @@
                 </a:solidFill>
                 <a:latin typeface="微软雅黑"/>
               </a:rPr>
-              <a:t>支持语音输入 · 离线可用 · 手机/电脑多端适配</a:t>
+              <a:t>支持语音输入 · 口语转正式 · 离线可用 · 手机/电脑多端适配</a:t>
             </a:r>
           </a:p>
         </p:txBody>
@@ -14996,7 +14996,7 @@
                 </a:solidFill>
                 <a:latin typeface="微软雅黑"/>
               </a:rPr>
-              <a:t>意图识别</a:t>
+              <a:t>口语转正式 + 9类意图识别</a:t>
             </a:r>
             <a:br/>
             <a:r>
@@ -15099,7 +15099,7 @@
                 </a:solidFill>
                 <a:latin typeface="微软雅黑"/>
               </a:rPr>
-              <a:t>+ RAG 案例检索</a:t>
+              <a:t>+ RAG案例 + 行动强度分级</a:t>
             </a:r>
           </a:p>
         </p:txBody>
@@ -15182,7 +15182,7 @@
                 </a:solidFill>
                 <a:latin typeface="微软雅黑"/>
               </a:rPr>
-              <a:t>生成申报单 + 发邮件</a:t>
+              <a:t>申报+发邮件+审批</a:t>
             </a:r>
             <a:br/>
             <a:r>
@@ -15192,7 +15192,7 @@
                 </a:solidFill>
                 <a:latin typeface="微软雅黑"/>
               </a:rPr>
-              <a:t>+ 自证声明</a:t>
+              <a:t>+回执+自证声明</a:t>
             </a:r>
           </a:p>
         </p:txBody>
@@ -15285,7 +15285,7 @@
                 </a:solidFill>
                 <a:latin typeface="微软雅黑"/>
               </a:rPr>
-              <a:t>+ 行为留痕</a:t>
+              <a:t>+ 留痕 + 合规小贴士</a:t>
             </a:r>
           </a:p>
         </p:txBody>
@@ -15562,7 +15562,7 @@
                 </a:solidFill>
                 <a:latin typeface="微软雅黑"/>
               </a:rPr>
-              <a:t>一句话换判断+清单+申报单</a:t>
+              <a:t>口语转正式+申报+自证</a:t>
             </a:r>
           </a:p>
         </p:txBody>
@@ -15645,7 +15645,7 @@
                 </a:solidFill>
                 <a:latin typeface="微软雅黑"/>
               </a:rPr>
-              <a:t>从「被动审查」到</a:t>
+              <a:t>从「被动审查」到「签名审批」</a:t>
             </a:r>
             <a:br/>
             <a:r>
@@ -15655,7 +15655,7 @@
                 </a:solidFill>
                 <a:latin typeface="微软雅黑"/>
               </a:rPr>
-              <a:t>「主动申报+留痕可查」</a:t>
+              <a:t>独立审查视角+回执留痕</a:t>
             </a:r>
           </a:p>
         </p:txBody>

--- a/商策PPT_暑假不回家队.pptx
+++ b/商策PPT_暑假不回家队.pptx
@@ -15182,7 +15182,7 @@
                 </a:solidFill>
                 <a:latin typeface="微软雅黑"/>
               </a:rPr>
-              <a:t>申报+发邮件+审批</a:t>
+              <a:t>申报+发邮件+审批+回执</a:t>
             </a:r>
             <a:br/>
             <a:r>
@@ -15192,7 +15192,7 @@
                 </a:solidFill>
                 <a:latin typeface="微软雅黑"/>
               </a:rPr>
-              <a:t>+回执+自证声明</a:t>
+              <a:t>+自证(手写签名+电子印章)</a:t>
             </a:r>
           </a:p>
         </p:txBody>

--- a/商策PPT_暑假不回家队.pptx
+++ b/商策PPT_暑假不回家队.pptx
@@ -16919,6 +16919,45 @@
           <a:xfrm>
             <a:off x="548640" y="5394960"/>
             <a:ext cx="11064240" cy="640080"/>
+          </a:xfrm>
+          <a:prstGeom prst="rect">
+            <a:avLst/>
+          </a:prstGeom>
+          <a:noFill/>
+        </p:spPr>
+        <p:txBody>
+          <a:bodyPr wrap="square" anchor="t">
+            <a:spAutoFit/>
+          </a:bodyPr>
+          <a:lstStyle/>
+          <a:p>
+            <a:pPr algn="l">
+              <a:lnSpc>
+                <a:spcPct val="100000"/>
+              </a:lnSpc>
+            </a:pPr>
+            <a:r>
+              <a:rPr sz="1300" b="0">
+                <a:solidFill>
+                  <a:srgbClr val="6B7280"/>
+                </a:solidFill>
+                <a:latin typeface="微软雅黑"/>
+              </a:rPr>
+              <a:t>金融文本分析：TF-IDF 词向量 + Jieba 分词 + 关键词加权 + 否定词处理</a:t>
+            </a:r>
+          </a:p>
+        </p:txBody>
+      </p:sp>
+      <p:sp>
+        <p:nvSpPr>
+          <p:cNvPr id="25" name="TextBox 24"/>
+          <p:cNvSpPr txBox="1"/>
+          <p:nvPr/>
+        </p:nvSpPr>
+        <p:spPr>
+          <a:xfrm>
+            <a:off x="548640" y="5806440"/>
+            <a:ext cx="11064240" cy="548640"/>
           </a:xfrm>
           <a:prstGeom prst="rect">
             <a:avLst/>
